--- a/docx/Book_Match_Thuyet_Trinh.pptx
+++ b/docx/Book_Match_Thuyet_Trinh.pptx
@@ -5,31 +5,31 @@
     <p:sldMasterId id="2147483648" r:id="rId1"/>
   </p:sldMasterIdLst>
   <p:sldIdLst>
-    <p:sldId id="256" r:id="rId7"/>
-    <p:sldId id="257" r:id="rId8"/>
-    <p:sldId id="258" r:id="rId9"/>
-    <p:sldId id="259" r:id="rId10"/>
-    <p:sldId id="260" r:id="rId11"/>
-    <p:sldId id="261" r:id="rId12"/>
-    <p:sldId id="262" r:id="rId13"/>
-    <p:sldId id="263" r:id="rId14"/>
-    <p:sldId id="264" r:id="rId15"/>
-    <p:sldId id="265" r:id="rId16"/>
-    <p:sldId id="266" r:id="rId17"/>
-    <p:sldId id="267" r:id="rId18"/>
-    <p:sldId id="268" r:id="rId19"/>
-    <p:sldId id="269" r:id="rId20"/>
-    <p:sldId id="270" r:id="rId21"/>
-    <p:sldId id="271" r:id="rId22"/>
-    <p:sldId id="272" r:id="rId23"/>
-    <p:sldId id="273" r:id="rId24"/>
-    <p:sldId id="274" r:id="rId25"/>
-    <p:sldId id="275" r:id="rId26"/>
-    <p:sldId id="276" r:id="rId27"/>
-    <p:sldId id="277" r:id="rId28"/>
-    <p:sldId id="278" r:id="rId29"/>
+    <p:sldId id="256" r:id="rId2"/>
+    <p:sldId id="257" r:id="rId3"/>
+    <p:sldId id="258" r:id="rId4"/>
+    <p:sldId id="259" r:id="rId5"/>
+    <p:sldId id="260" r:id="rId6"/>
+    <p:sldId id="261" r:id="rId7"/>
+    <p:sldId id="262" r:id="rId8"/>
+    <p:sldId id="263" r:id="rId9"/>
+    <p:sldId id="264" r:id="rId10"/>
+    <p:sldId id="265" r:id="rId11"/>
+    <p:sldId id="266" r:id="rId12"/>
+    <p:sldId id="267" r:id="rId13"/>
+    <p:sldId id="268" r:id="rId14"/>
+    <p:sldId id="269" r:id="rId15"/>
+    <p:sldId id="270" r:id="rId16"/>
+    <p:sldId id="271" r:id="rId17"/>
+    <p:sldId id="272" r:id="rId18"/>
+    <p:sldId id="273" r:id="rId19"/>
+    <p:sldId id="274" r:id="rId20"/>
+    <p:sldId id="275" r:id="rId21"/>
+    <p:sldId id="276" r:id="rId22"/>
+    <p:sldId id="277" r:id="rId23"/>
+    <p:sldId id="278" r:id="rId24"/>
   </p:sldIdLst>
-  <p:sldSz cx="12191695" cy="6858000" type="screen4x3"/>
+  <p:sldSz cx="12192000" cy="6858000"/>
   <p:notesSz cx="6858000" cy="9144000"/>
   <p:defaultTextStyle>
     <a:defPPr>
@@ -126,6 +126,22 @@
       </a:defRPr>
     </a:lvl9pPr>
   </p:defaultTextStyle>
+  <p:extLst>
+    <p:ext uri="{EFAFB233-063F-42B5-8137-9DF3F51BA10A}">
+      <p15:sldGuideLst xmlns:p15="http://schemas.microsoft.com/office/powerpoint/2012/main">
+        <p15:guide id="1" orient="horz" pos="2160">
+          <p15:clr>
+            <a:srgbClr val="A4A3A4"/>
+          </p15:clr>
+        </p15:guide>
+        <p15:guide id="2" pos="2880">
+          <p15:clr>
+            <a:srgbClr val="A4A3A4"/>
+          </p15:clr>
+        </p15:guide>
+      </p15:sldGuideLst>
+    </p:ext>
+  </p:extLst>
 </p:presentation>
 </file>
 
@@ -167,10 +183,9 @@
           <a:lstStyle/>
           <a:p>
             <a:r>
-              <a:rPr lang="en-US" smtClean="0"/>
+              <a:rPr lang="en-US"/>
               <a:t>Click to edit Master title style</a:t>
             </a:r>
-            <a:endParaRPr lang="en-US"/>
           </a:p>
         </p:txBody>
       </p:sp>
@@ -286,10 +301,9 @@
           </a:lstStyle>
           <a:p>
             <a:r>
-              <a:rPr lang="en-US" smtClean="0"/>
+              <a:rPr lang="en-US"/>
               <a:t>Click to edit Master subtitle style</a:t>
             </a:r>
-            <a:endParaRPr lang="en-US"/>
           </a:p>
         </p:txBody>
       </p:sp>
@@ -310,7 +324,7 @@
           <a:p>
             <a:fld id="{5BCAD085-E8A6-8845-BD4E-CB4CCA059FC4}" type="datetimeFigureOut">
               <a:rPr lang="en-US" smtClean="0"/>
-              <a:t>1/27/13</a:t>
+              <a:t>5/30/2026</a:t>
             </a:fld>
             <a:endParaRPr lang="en-US"/>
           </a:p>
@@ -404,10 +418,9 @@
           <a:lstStyle/>
           <a:p>
             <a:r>
-              <a:rPr lang="en-US" smtClean="0"/>
+              <a:rPr lang="en-US"/>
               <a:t>Click to edit Master title style</a:t>
             </a:r>
-            <a:endParaRPr lang="en-US"/>
           </a:p>
         </p:txBody>
       </p:sp>
@@ -428,38 +441,37 @@
           <a:p>
             <a:pPr lvl="0"/>
             <a:r>
-              <a:rPr lang="en-US" smtClean="0"/>
+              <a:rPr lang="en-US"/>
               <a:t>Click to edit Master text styles</a:t>
             </a:r>
           </a:p>
           <a:p>
             <a:pPr lvl="1"/>
             <a:r>
-              <a:rPr lang="en-US" smtClean="0"/>
+              <a:rPr lang="en-US"/>
               <a:t>Second level</a:t>
             </a:r>
           </a:p>
           <a:p>
             <a:pPr lvl="2"/>
             <a:r>
-              <a:rPr lang="en-US" smtClean="0"/>
+              <a:rPr lang="en-US"/>
               <a:t>Third level</a:t>
             </a:r>
           </a:p>
           <a:p>
             <a:pPr lvl="3"/>
             <a:r>
-              <a:rPr lang="en-US" smtClean="0"/>
+              <a:rPr lang="en-US"/>
               <a:t>Fourth level</a:t>
             </a:r>
           </a:p>
           <a:p>
             <a:pPr lvl="4"/>
             <a:r>
-              <a:rPr lang="en-US" smtClean="0"/>
+              <a:rPr lang="en-US"/>
               <a:t>Fifth level</a:t>
             </a:r>
-            <a:endParaRPr lang="en-US"/>
           </a:p>
         </p:txBody>
       </p:sp>
@@ -480,7 +492,7 @@
           <a:p>
             <a:fld id="{5BCAD085-E8A6-8845-BD4E-CB4CCA059FC4}" type="datetimeFigureOut">
               <a:rPr lang="en-US" smtClean="0"/>
-              <a:t>1/27/13</a:t>
+              <a:t>5/30/2026</a:t>
             </a:fld>
             <a:endParaRPr lang="en-US"/>
           </a:p>
@@ -579,10 +591,9 @@
           <a:lstStyle/>
           <a:p>
             <a:r>
-              <a:rPr lang="en-US" smtClean="0"/>
+              <a:rPr lang="en-US"/>
               <a:t>Click to edit Master title style</a:t>
             </a:r>
-            <a:endParaRPr lang="en-US"/>
           </a:p>
         </p:txBody>
       </p:sp>
@@ -608,38 +619,37 @@
           <a:p>
             <a:pPr lvl="0"/>
             <a:r>
-              <a:rPr lang="en-US" smtClean="0"/>
+              <a:rPr lang="en-US"/>
               <a:t>Click to edit Master text styles</a:t>
             </a:r>
           </a:p>
           <a:p>
             <a:pPr lvl="1"/>
             <a:r>
-              <a:rPr lang="en-US" smtClean="0"/>
+              <a:rPr lang="en-US"/>
               <a:t>Second level</a:t>
             </a:r>
           </a:p>
           <a:p>
             <a:pPr lvl="2"/>
             <a:r>
-              <a:rPr lang="en-US" smtClean="0"/>
+              <a:rPr lang="en-US"/>
               <a:t>Third level</a:t>
             </a:r>
           </a:p>
           <a:p>
             <a:pPr lvl="3"/>
             <a:r>
-              <a:rPr lang="en-US" smtClean="0"/>
+              <a:rPr lang="en-US"/>
               <a:t>Fourth level</a:t>
             </a:r>
           </a:p>
           <a:p>
             <a:pPr lvl="4"/>
             <a:r>
-              <a:rPr lang="en-US" smtClean="0"/>
+              <a:rPr lang="en-US"/>
               <a:t>Fifth level</a:t>
             </a:r>
-            <a:endParaRPr lang="en-US"/>
           </a:p>
         </p:txBody>
       </p:sp>
@@ -660,7 +670,7 @@
           <a:p>
             <a:fld id="{5BCAD085-E8A6-8845-BD4E-CB4CCA059FC4}" type="datetimeFigureOut">
               <a:rPr lang="en-US" smtClean="0"/>
-              <a:t>1/27/13</a:t>
+              <a:t>5/30/2026</a:t>
             </a:fld>
             <a:endParaRPr lang="en-US"/>
           </a:p>
@@ -754,10 +764,9 @@
           <a:lstStyle/>
           <a:p>
             <a:r>
-              <a:rPr lang="en-US" smtClean="0"/>
+              <a:rPr lang="en-US"/>
               <a:t>Click to edit Master title style</a:t>
             </a:r>
-            <a:endParaRPr lang="en-US"/>
           </a:p>
         </p:txBody>
       </p:sp>
@@ -778,38 +787,37 @@
           <a:p>
             <a:pPr lvl="0"/>
             <a:r>
-              <a:rPr lang="en-US" smtClean="0"/>
+              <a:rPr lang="en-US"/>
               <a:t>Click to edit Master text styles</a:t>
             </a:r>
           </a:p>
           <a:p>
             <a:pPr lvl="1"/>
             <a:r>
-              <a:rPr lang="en-US" smtClean="0"/>
+              <a:rPr lang="en-US"/>
               <a:t>Second level</a:t>
             </a:r>
           </a:p>
           <a:p>
             <a:pPr lvl="2"/>
             <a:r>
-              <a:rPr lang="en-US" smtClean="0"/>
+              <a:rPr lang="en-US"/>
               <a:t>Third level</a:t>
             </a:r>
           </a:p>
           <a:p>
             <a:pPr lvl="3"/>
             <a:r>
-              <a:rPr lang="en-US" smtClean="0"/>
+              <a:rPr lang="en-US"/>
               <a:t>Fourth level</a:t>
             </a:r>
           </a:p>
           <a:p>
             <a:pPr lvl="4"/>
             <a:r>
-              <a:rPr lang="en-US" smtClean="0"/>
+              <a:rPr lang="en-US"/>
               <a:t>Fifth level</a:t>
             </a:r>
-            <a:endParaRPr lang="en-US"/>
           </a:p>
         </p:txBody>
       </p:sp>
@@ -830,7 +838,7 @@
           <a:p>
             <a:fld id="{5BCAD085-E8A6-8845-BD4E-CB4CCA059FC4}" type="datetimeFigureOut">
               <a:rPr lang="en-US" smtClean="0"/>
-              <a:t>1/27/13</a:t>
+              <a:t>5/30/2026</a:t>
             </a:fld>
             <a:endParaRPr lang="en-US"/>
           </a:p>
@@ -933,10 +941,9 @@
           </a:lstStyle>
           <a:p>
             <a:r>
-              <a:rPr lang="en-US" smtClean="0"/>
+              <a:rPr lang="en-US"/>
               <a:t>Click to edit Master title style</a:t>
             </a:r>
-            <a:endParaRPr lang="en-US"/>
           </a:p>
         </p:txBody>
       </p:sp>
@@ -1053,7 +1060,7 @@
           <a:p>
             <a:pPr lvl="0"/>
             <a:r>
-              <a:rPr lang="en-US" smtClean="0"/>
+              <a:rPr lang="en-US"/>
               <a:t>Click to edit Master text styles</a:t>
             </a:r>
           </a:p>
@@ -1076,7 +1083,7 @@
           <a:p>
             <a:fld id="{5BCAD085-E8A6-8845-BD4E-CB4CCA059FC4}" type="datetimeFigureOut">
               <a:rPr lang="en-US" smtClean="0"/>
-              <a:t>1/27/13</a:t>
+              <a:t>5/30/2026</a:t>
             </a:fld>
             <a:endParaRPr lang="en-US"/>
           </a:p>
@@ -1170,10 +1177,9 @@
           <a:lstStyle/>
           <a:p>
             <a:r>
-              <a:rPr lang="en-US" smtClean="0"/>
+              <a:rPr lang="en-US"/>
               <a:t>Click to edit Master title style</a:t>
             </a:r>
-            <a:endParaRPr lang="en-US"/>
           </a:p>
         </p:txBody>
       </p:sp>
@@ -1227,38 +1233,37 @@
           <a:p>
             <a:pPr lvl="0"/>
             <a:r>
-              <a:rPr lang="en-US" smtClean="0"/>
+              <a:rPr lang="en-US"/>
               <a:t>Click to edit Master text styles</a:t>
             </a:r>
           </a:p>
           <a:p>
             <a:pPr lvl="1"/>
             <a:r>
-              <a:rPr lang="en-US" smtClean="0"/>
+              <a:rPr lang="en-US"/>
               <a:t>Second level</a:t>
             </a:r>
           </a:p>
           <a:p>
             <a:pPr lvl="2"/>
             <a:r>
-              <a:rPr lang="en-US" smtClean="0"/>
+              <a:rPr lang="en-US"/>
               <a:t>Third level</a:t>
             </a:r>
           </a:p>
           <a:p>
             <a:pPr lvl="3"/>
             <a:r>
-              <a:rPr lang="en-US" smtClean="0"/>
+              <a:rPr lang="en-US"/>
               <a:t>Fourth level</a:t>
             </a:r>
           </a:p>
           <a:p>
             <a:pPr lvl="4"/>
             <a:r>
-              <a:rPr lang="en-US" smtClean="0"/>
+              <a:rPr lang="en-US"/>
               <a:t>Fifth level</a:t>
             </a:r>
-            <a:endParaRPr lang="en-US"/>
           </a:p>
         </p:txBody>
       </p:sp>
@@ -1312,38 +1317,37 @@
           <a:p>
             <a:pPr lvl="0"/>
             <a:r>
-              <a:rPr lang="en-US" smtClean="0"/>
+              <a:rPr lang="en-US"/>
               <a:t>Click to edit Master text styles</a:t>
             </a:r>
           </a:p>
           <a:p>
             <a:pPr lvl="1"/>
             <a:r>
-              <a:rPr lang="en-US" smtClean="0"/>
+              <a:rPr lang="en-US"/>
               <a:t>Second level</a:t>
             </a:r>
           </a:p>
           <a:p>
             <a:pPr lvl="2"/>
             <a:r>
-              <a:rPr lang="en-US" smtClean="0"/>
+              <a:rPr lang="en-US"/>
               <a:t>Third level</a:t>
             </a:r>
           </a:p>
           <a:p>
             <a:pPr lvl="3"/>
             <a:r>
-              <a:rPr lang="en-US" smtClean="0"/>
+              <a:rPr lang="en-US"/>
               <a:t>Fourth level</a:t>
             </a:r>
           </a:p>
           <a:p>
             <a:pPr lvl="4"/>
             <a:r>
-              <a:rPr lang="en-US" smtClean="0"/>
+              <a:rPr lang="en-US"/>
               <a:t>Fifth level</a:t>
             </a:r>
-            <a:endParaRPr lang="en-US"/>
           </a:p>
         </p:txBody>
       </p:sp>
@@ -1364,7 +1368,7 @@
           <a:p>
             <a:fld id="{5BCAD085-E8A6-8845-BD4E-CB4CCA059FC4}" type="datetimeFigureOut">
               <a:rPr lang="en-US" smtClean="0"/>
-              <a:t>1/27/13</a:t>
+              <a:t>5/30/2026</a:t>
             </a:fld>
             <a:endParaRPr lang="en-US"/>
           </a:p>
@@ -1462,10 +1466,9 @@
           </a:lstStyle>
           <a:p>
             <a:r>
-              <a:rPr lang="en-US" smtClean="0"/>
+              <a:rPr lang="en-US"/>
               <a:t>Click to edit Master title style</a:t>
             </a:r>
-            <a:endParaRPr lang="en-US"/>
           </a:p>
         </p:txBody>
       </p:sp>
@@ -1528,7 +1531,7 @@
           <a:p>
             <a:pPr lvl="0"/>
             <a:r>
-              <a:rPr lang="en-US" smtClean="0"/>
+              <a:rPr lang="en-US"/>
               <a:t>Click to edit Master text styles</a:t>
             </a:r>
           </a:p>
@@ -1584,38 +1587,37 @@
           <a:p>
             <a:pPr lvl="0"/>
             <a:r>
-              <a:rPr lang="en-US" smtClean="0"/>
+              <a:rPr lang="en-US"/>
               <a:t>Click to edit Master text styles</a:t>
             </a:r>
           </a:p>
           <a:p>
             <a:pPr lvl="1"/>
             <a:r>
-              <a:rPr lang="en-US" smtClean="0"/>
+              <a:rPr lang="en-US"/>
               <a:t>Second level</a:t>
             </a:r>
           </a:p>
           <a:p>
             <a:pPr lvl="2"/>
             <a:r>
-              <a:rPr lang="en-US" smtClean="0"/>
+              <a:rPr lang="en-US"/>
               <a:t>Third level</a:t>
             </a:r>
           </a:p>
           <a:p>
             <a:pPr lvl="3"/>
             <a:r>
-              <a:rPr lang="en-US" smtClean="0"/>
+              <a:rPr lang="en-US"/>
               <a:t>Fourth level</a:t>
             </a:r>
           </a:p>
           <a:p>
             <a:pPr lvl="4"/>
             <a:r>
-              <a:rPr lang="en-US" smtClean="0"/>
+              <a:rPr lang="en-US"/>
               <a:t>Fifth level</a:t>
             </a:r>
-            <a:endParaRPr lang="en-US"/>
           </a:p>
         </p:txBody>
       </p:sp>
@@ -1678,7 +1680,7 @@
           <a:p>
             <a:pPr lvl="0"/>
             <a:r>
-              <a:rPr lang="en-US" smtClean="0"/>
+              <a:rPr lang="en-US"/>
               <a:t>Click to edit Master text styles</a:t>
             </a:r>
           </a:p>
@@ -1734,38 +1736,37 @@
           <a:p>
             <a:pPr lvl="0"/>
             <a:r>
-              <a:rPr lang="en-US" smtClean="0"/>
+              <a:rPr lang="en-US"/>
               <a:t>Click to edit Master text styles</a:t>
             </a:r>
           </a:p>
           <a:p>
             <a:pPr lvl="1"/>
             <a:r>
-              <a:rPr lang="en-US" smtClean="0"/>
+              <a:rPr lang="en-US"/>
               <a:t>Second level</a:t>
             </a:r>
           </a:p>
           <a:p>
             <a:pPr lvl="2"/>
             <a:r>
-              <a:rPr lang="en-US" smtClean="0"/>
+              <a:rPr lang="en-US"/>
               <a:t>Third level</a:t>
             </a:r>
           </a:p>
           <a:p>
             <a:pPr lvl="3"/>
             <a:r>
-              <a:rPr lang="en-US" smtClean="0"/>
+              <a:rPr lang="en-US"/>
               <a:t>Fourth level</a:t>
             </a:r>
           </a:p>
           <a:p>
             <a:pPr lvl="4"/>
             <a:r>
-              <a:rPr lang="en-US" smtClean="0"/>
+              <a:rPr lang="en-US"/>
               <a:t>Fifth level</a:t>
             </a:r>
-            <a:endParaRPr lang="en-US"/>
           </a:p>
         </p:txBody>
       </p:sp>
@@ -1786,7 +1787,7 @@
           <a:p>
             <a:fld id="{5BCAD085-E8A6-8845-BD4E-CB4CCA059FC4}" type="datetimeFigureOut">
               <a:rPr lang="en-US" smtClean="0"/>
-              <a:t>1/27/13</a:t>
+              <a:t>5/30/2026</a:t>
             </a:fld>
             <a:endParaRPr lang="en-US"/>
           </a:p>
@@ -1880,10 +1881,9 @@
           <a:lstStyle/>
           <a:p>
             <a:r>
-              <a:rPr lang="en-US" smtClean="0"/>
+              <a:rPr lang="en-US"/>
               <a:t>Click to edit Master title style</a:t>
             </a:r>
-            <a:endParaRPr lang="en-US"/>
           </a:p>
         </p:txBody>
       </p:sp>
@@ -1904,7 +1904,7 @@
           <a:p>
             <a:fld id="{5BCAD085-E8A6-8845-BD4E-CB4CCA059FC4}" type="datetimeFigureOut">
               <a:rPr lang="en-US" smtClean="0"/>
-              <a:t>1/27/13</a:t>
+              <a:t>5/30/2026</a:t>
             </a:fld>
             <a:endParaRPr lang="en-US"/>
           </a:p>
@@ -1999,7 +1999,7 @@
           <a:p>
             <a:fld id="{5BCAD085-E8A6-8845-BD4E-CB4CCA059FC4}" type="datetimeFigureOut">
               <a:rPr lang="en-US" smtClean="0"/>
-              <a:t>1/27/13</a:t>
+              <a:t>5/30/2026</a:t>
             </a:fld>
             <a:endParaRPr lang="en-US"/>
           </a:p>
@@ -2102,10 +2102,9 @@
           </a:lstStyle>
           <a:p>
             <a:r>
-              <a:rPr lang="en-US" smtClean="0"/>
+              <a:rPr lang="en-US"/>
               <a:t>Click to edit Master title style</a:t>
             </a:r>
-            <a:endParaRPr lang="en-US"/>
           </a:p>
         </p:txBody>
       </p:sp>
@@ -2159,38 +2158,37 @@
           <a:p>
             <a:pPr lvl="0"/>
             <a:r>
-              <a:rPr lang="en-US" smtClean="0"/>
+              <a:rPr lang="en-US"/>
               <a:t>Click to edit Master text styles</a:t>
             </a:r>
           </a:p>
           <a:p>
             <a:pPr lvl="1"/>
             <a:r>
-              <a:rPr lang="en-US" smtClean="0"/>
+              <a:rPr lang="en-US"/>
               <a:t>Second level</a:t>
             </a:r>
           </a:p>
           <a:p>
             <a:pPr lvl="2"/>
             <a:r>
-              <a:rPr lang="en-US" smtClean="0"/>
+              <a:rPr lang="en-US"/>
               <a:t>Third level</a:t>
             </a:r>
           </a:p>
           <a:p>
             <a:pPr lvl="3"/>
             <a:r>
-              <a:rPr lang="en-US" smtClean="0"/>
+              <a:rPr lang="en-US"/>
               <a:t>Fourth level</a:t>
             </a:r>
           </a:p>
           <a:p>
             <a:pPr lvl="4"/>
             <a:r>
-              <a:rPr lang="en-US" smtClean="0"/>
+              <a:rPr lang="en-US"/>
               <a:t>Fifth level</a:t>
             </a:r>
-            <a:endParaRPr lang="en-US"/>
           </a:p>
         </p:txBody>
       </p:sp>
@@ -2253,7 +2251,7 @@
           <a:p>
             <a:pPr lvl="0"/>
             <a:r>
-              <a:rPr lang="en-US" smtClean="0"/>
+              <a:rPr lang="en-US"/>
               <a:t>Click to edit Master text styles</a:t>
             </a:r>
           </a:p>
@@ -2276,7 +2274,7 @@
           <a:p>
             <a:fld id="{5BCAD085-E8A6-8845-BD4E-CB4CCA059FC4}" type="datetimeFigureOut">
               <a:rPr lang="en-US" smtClean="0"/>
-              <a:t>1/27/13</a:t>
+              <a:t>5/30/2026</a:t>
             </a:fld>
             <a:endParaRPr lang="en-US"/>
           </a:p>
@@ -2379,10 +2377,9 @@
           </a:lstStyle>
           <a:p>
             <a:r>
-              <a:rPr lang="en-US" smtClean="0"/>
+              <a:rPr lang="en-US"/>
               <a:t>Click to edit Master title style</a:t>
             </a:r>
-            <a:endParaRPr lang="en-US"/>
           </a:p>
         </p:txBody>
       </p:sp>
@@ -2506,7 +2503,7 @@
           <a:p>
             <a:pPr lvl="0"/>
             <a:r>
-              <a:rPr lang="en-US" smtClean="0"/>
+              <a:rPr lang="en-US"/>
               <a:t>Click to edit Master text styles</a:t>
             </a:r>
           </a:p>
@@ -2529,7 +2526,7 @@
           <a:p>
             <a:fld id="{5BCAD085-E8A6-8845-BD4E-CB4CCA059FC4}" type="datetimeFigureOut">
               <a:rPr lang="en-US" smtClean="0"/>
-              <a:t>1/27/13</a:t>
+              <a:t>5/30/2026</a:t>
             </a:fld>
             <a:endParaRPr lang="en-US"/>
           </a:p>
@@ -2638,10 +2635,9 @@
           <a:lstStyle/>
           <a:p>
             <a:r>
-              <a:rPr lang="en-US" smtClean="0"/>
+              <a:rPr lang="en-US"/>
               <a:t>Click to edit Master title style</a:t>
             </a:r>
-            <a:endParaRPr lang="en-US"/>
           </a:p>
         </p:txBody>
       </p:sp>
@@ -2672,38 +2668,37 @@
           <a:p>
             <a:pPr lvl="0"/>
             <a:r>
-              <a:rPr lang="en-US" smtClean="0"/>
+              <a:rPr lang="en-US"/>
               <a:t>Click to edit Master text styles</a:t>
             </a:r>
           </a:p>
           <a:p>
             <a:pPr lvl="1"/>
             <a:r>
-              <a:rPr lang="en-US" smtClean="0"/>
+              <a:rPr lang="en-US"/>
               <a:t>Second level</a:t>
             </a:r>
           </a:p>
           <a:p>
             <a:pPr lvl="2"/>
             <a:r>
-              <a:rPr lang="en-US" smtClean="0"/>
+              <a:rPr lang="en-US"/>
               <a:t>Third level</a:t>
             </a:r>
           </a:p>
           <a:p>
             <a:pPr lvl="3"/>
             <a:r>
-              <a:rPr lang="en-US" smtClean="0"/>
+              <a:rPr lang="en-US"/>
               <a:t>Fourth level</a:t>
             </a:r>
           </a:p>
           <a:p>
             <a:pPr lvl="4"/>
             <a:r>
-              <a:rPr lang="en-US" smtClean="0"/>
+              <a:rPr lang="en-US"/>
               <a:t>Fifth level</a:t>
             </a:r>
-            <a:endParaRPr lang="en-US"/>
           </a:p>
         </p:txBody>
       </p:sp>
@@ -2742,7 +2737,7 @@
           <a:p>
             <a:fld id="{5BCAD085-E8A6-8845-BD4E-CB4CCA059FC4}" type="datetimeFigureOut">
               <a:rPr lang="en-US" smtClean="0"/>
-              <a:t>1/27/13</a:t>
+              <a:t>5/30/2026</a:t>
             </a:fld>
             <a:endParaRPr lang="en-US"/>
           </a:p>
@@ -3101,7 +3096,7 @@
 </file>
 
 <file path=ppt/slides/slide1.xml><?xml version="1.0" encoding="utf-8"?>
-<p:sld xmlns:a="http://schemas.openxmlformats.org/drawingml/2006/main" xmlns:p="http://schemas.openxmlformats.org/presentationml/2006/main" xmlns:r="http://schemas.openxmlformats.org/officeDocument/2006/relationships">
+<p:sld xmlns:a="http://schemas.openxmlformats.org/drawingml/2006/main" xmlns:r="http://schemas.openxmlformats.org/officeDocument/2006/relationships" xmlns:p="http://schemas.openxmlformats.org/presentationml/2006/main">
   <p:cSld>
     <p:spTree>
       <p:nvGrpSpPr>
@@ -3109,7 +3104,14 @@
         <p:cNvGrpSpPr/>
         <p:nvPr/>
       </p:nvGrpSpPr>
-      <p:grpSpPr/>
+      <p:grpSpPr>
+        <a:xfrm>
+          <a:off x="0" y="0"/>
+          <a:ext cx="0" cy="0"/>
+          <a:chOff x="0" y="0"/>
+          <a:chExt cx="0" cy="0"/>
+        </a:xfrm>
+      </p:grpSpPr>
       <p:sp>
         <p:nvSpPr>
           <p:cNvPr id="2" name="Rectangle 1"/>
@@ -3150,6 +3152,7 @@
           <a:lstStyle/>
           <a:p>
             <a:pPr algn="ctr"/>
+            <a:endParaRPr/>
           </a:p>
         </p:txBody>
       </p:sp>
@@ -3229,6 +3232,7 @@
           <a:lstStyle/>
           <a:p>
             <a:pPr algn="ctr"/>
+            <a:endParaRPr/>
           </a:p>
         </p:txBody>
       </p:sp>
@@ -3349,7 +3353,7 @@
 </file>
 
 <file path=ppt/slides/slide10.xml><?xml version="1.0" encoding="utf-8"?>
-<p:sld xmlns:a="http://schemas.openxmlformats.org/drawingml/2006/main" xmlns:p="http://schemas.openxmlformats.org/presentationml/2006/main" xmlns:r="http://schemas.openxmlformats.org/officeDocument/2006/relationships">
+<p:sld xmlns:a="http://schemas.openxmlformats.org/drawingml/2006/main" xmlns:r="http://schemas.openxmlformats.org/officeDocument/2006/relationships" xmlns:p="http://schemas.openxmlformats.org/presentationml/2006/main">
   <p:cSld>
     <p:spTree>
       <p:nvGrpSpPr>
@@ -3357,7 +3361,14 @@
         <p:cNvGrpSpPr/>
         <p:nvPr/>
       </p:nvGrpSpPr>
-      <p:grpSpPr/>
+      <p:grpSpPr>
+        <a:xfrm>
+          <a:off x="0" y="0"/>
+          <a:ext cx="0" cy="0"/>
+          <a:chOff x="0" y="0"/>
+          <a:chExt cx="0" cy="0"/>
+        </a:xfrm>
+      </p:grpSpPr>
       <p:sp>
         <p:nvSpPr>
           <p:cNvPr id="2" name="Rectangle 1"/>
@@ -3398,6 +3409,7 @@
           <a:lstStyle/>
           <a:p>
             <a:pPr algn="ctr"/>
+            <a:endParaRPr/>
           </a:p>
         </p:txBody>
       </p:sp>
@@ -3477,6 +3489,7 @@
           <a:lstStyle/>
           <a:p>
             <a:pPr algn="ctr"/>
+            <a:endParaRPr/>
           </a:p>
         </p:txBody>
       </p:sp>
@@ -3517,6 +3530,7 @@
           <a:lstStyle/>
           <a:p>
             <a:pPr algn="ctr"/>
+            <a:endParaRPr/>
           </a:p>
         </p:txBody>
       </p:sp>
@@ -3705,6 +3719,7 @@
           <a:lstStyle/>
           <a:p>
             <a:pPr algn="ctr"/>
+            <a:endParaRPr/>
           </a:p>
         </p:txBody>
       </p:sp>
@@ -3893,6 +3908,7 @@
           <a:lstStyle/>
           <a:p>
             <a:pPr algn="ctr"/>
+            <a:endParaRPr/>
           </a:p>
         </p:txBody>
       </p:sp>
@@ -4048,6 +4064,7 @@
           <a:lstStyle/>
           <a:p>
             <a:pPr algn="ctr"/>
+            <a:endParaRPr/>
           </a:p>
         </p:txBody>
       </p:sp>
@@ -4168,7 +4185,7 @@
 </file>
 
 <file path=ppt/slides/slide11.xml><?xml version="1.0" encoding="utf-8"?>
-<p:sld xmlns:a="http://schemas.openxmlformats.org/drawingml/2006/main" xmlns:p="http://schemas.openxmlformats.org/presentationml/2006/main" xmlns:r="http://schemas.openxmlformats.org/officeDocument/2006/relationships">
+<p:sld xmlns:a="http://schemas.openxmlformats.org/drawingml/2006/main" xmlns:r="http://schemas.openxmlformats.org/officeDocument/2006/relationships" xmlns:p="http://schemas.openxmlformats.org/presentationml/2006/main">
   <p:cSld>
     <p:spTree>
       <p:nvGrpSpPr>
@@ -4176,7 +4193,14 @@
         <p:cNvGrpSpPr/>
         <p:nvPr/>
       </p:nvGrpSpPr>
-      <p:grpSpPr/>
+      <p:grpSpPr>
+        <a:xfrm>
+          <a:off x="0" y="0"/>
+          <a:ext cx="0" cy="0"/>
+          <a:chOff x="0" y="0"/>
+          <a:chExt cx="0" cy="0"/>
+        </a:xfrm>
+      </p:grpSpPr>
       <p:sp>
         <p:nvSpPr>
           <p:cNvPr id="2" name="Rectangle 1"/>
@@ -4217,6 +4241,7 @@
           <a:lstStyle/>
           <a:p>
             <a:pPr algn="ctr"/>
+            <a:endParaRPr/>
           </a:p>
         </p:txBody>
       </p:sp>
@@ -4296,6 +4321,7 @@
           <a:lstStyle/>
           <a:p>
             <a:pPr algn="ctr"/>
+            <a:endParaRPr/>
           </a:p>
         </p:txBody>
       </p:sp>
@@ -4416,7 +4442,7 @@
 </file>
 
 <file path=ppt/slides/slide12.xml><?xml version="1.0" encoding="utf-8"?>
-<p:sld xmlns:a="http://schemas.openxmlformats.org/drawingml/2006/main" xmlns:p="http://schemas.openxmlformats.org/presentationml/2006/main" xmlns:r="http://schemas.openxmlformats.org/officeDocument/2006/relationships">
+<p:sld xmlns:a="http://schemas.openxmlformats.org/drawingml/2006/main" xmlns:r="http://schemas.openxmlformats.org/officeDocument/2006/relationships" xmlns:p="http://schemas.openxmlformats.org/presentationml/2006/main">
   <p:cSld>
     <p:spTree>
       <p:nvGrpSpPr>
@@ -4424,7 +4450,14 @@
         <p:cNvGrpSpPr/>
         <p:nvPr/>
       </p:nvGrpSpPr>
-      <p:grpSpPr/>
+      <p:grpSpPr>
+        <a:xfrm>
+          <a:off x="0" y="0"/>
+          <a:ext cx="0" cy="0"/>
+          <a:chOff x="0" y="0"/>
+          <a:chExt cx="0" cy="0"/>
+        </a:xfrm>
+      </p:grpSpPr>
       <p:sp>
         <p:nvSpPr>
           <p:cNvPr id="2" name="Rectangle 1"/>
@@ -4465,6 +4498,7 @@
           <a:lstStyle/>
           <a:p>
             <a:pPr algn="ctr"/>
+            <a:endParaRPr/>
           </a:p>
         </p:txBody>
       </p:sp>
@@ -4544,6 +4578,7 @@
           <a:lstStyle/>
           <a:p>
             <a:pPr algn="ctr"/>
+            <a:endParaRPr/>
           </a:p>
         </p:txBody>
       </p:sp>
@@ -4623,6 +4658,7 @@
           <a:lstStyle/>
           <a:p>
             <a:pPr algn="ctr"/>
+            <a:endParaRPr/>
           </a:p>
         </p:txBody>
       </p:sp>
@@ -4762,6 +4798,7 @@
           <a:lstStyle/>
           <a:p>
             <a:pPr algn="ctr"/>
+            <a:endParaRPr/>
           </a:p>
         </p:txBody>
       </p:sp>
@@ -4901,6 +4938,7 @@
           <a:lstStyle/>
           <a:p>
             <a:pPr algn="ctr"/>
+            <a:endParaRPr/>
           </a:p>
         </p:txBody>
       </p:sp>
@@ -5040,6 +5078,7 @@
           <a:lstStyle/>
           <a:p>
             <a:pPr algn="ctr"/>
+            <a:endParaRPr/>
           </a:p>
         </p:txBody>
       </p:sp>
@@ -5119,6 +5158,7 @@
           <a:lstStyle/>
           <a:p>
             <a:pPr algn="ctr"/>
+            <a:endParaRPr/>
           </a:p>
         </p:txBody>
       </p:sp>
@@ -5503,7 +5543,7 @@
 </file>
 
 <file path=ppt/slides/slide13.xml><?xml version="1.0" encoding="utf-8"?>
-<p:sld xmlns:a="http://schemas.openxmlformats.org/drawingml/2006/main" xmlns:p="http://schemas.openxmlformats.org/presentationml/2006/main" xmlns:r="http://schemas.openxmlformats.org/officeDocument/2006/relationships">
+<p:sld xmlns:a="http://schemas.openxmlformats.org/drawingml/2006/main" xmlns:r="http://schemas.openxmlformats.org/officeDocument/2006/relationships" xmlns:p="http://schemas.openxmlformats.org/presentationml/2006/main">
   <p:cSld>
     <p:spTree>
       <p:nvGrpSpPr>
@@ -5511,7 +5551,14 @@
         <p:cNvGrpSpPr/>
         <p:nvPr/>
       </p:nvGrpSpPr>
-      <p:grpSpPr/>
+      <p:grpSpPr>
+        <a:xfrm>
+          <a:off x="0" y="0"/>
+          <a:ext cx="0" cy="0"/>
+          <a:chOff x="0" y="0"/>
+          <a:chExt cx="0" cy="0"/>
+        </a:xfrm>
+      </p:grpSpPr>
       <p:sp>
         <p:nvSpPr>
           <p:cNvPr id="2" name="Rectangle 1"/>
@@ -5552,6 +5599,7 @@
           <a:lstStyle/>
           <a:p>
             <a:pPr algn="ctr"/>
+            <a:endParaRPr/>
           </a:p>
         </p:txBody>
       </p:sp>
@@ -5631,6 +5679,7 @@
           <a:lstStyle/>
           <a:p>
             <a:pPr algn="ctr"/>
+            <a:endParaRPr/>
           </a:p>
         </p:txBody>
       </p:sp>
@@ -5674,6 +5723,7 @@
           <a:lstStyle/>
           <a:p>
             <a:pPr algn="ctr"/>
+            <a:endParaRPr/>
           </a:p>
         </p:txBody>
       </p:sp>
@@ -5781,6 +5831,7 @@
           <a:lstStyle/>
           <a:p>
             <a:pPr algn="ctr"/>
+            <a:endParaRPr/>
           </a:p>
         </p:txBody>
       </p:sp>
@@ -6032,78 +6083,6 @@
             </a:pPr>
             <a:r>
               <a:t>• Đọc 20 trang (+90 XP)</a:t>
-            </a:r>
-          </a:p>
-        </p:txBody>
-      </p:sp>
-      <p:sp>
-        <p:nvSpPr>
-          <p:cNvPr id="16" name="TextBox 15"/>
-          <p:cNvSpPr txBox="1"/>
-          <p:nvPr/>
-        </p:nvSpPr>
-        <p:spPr>
-          <a:xfrm>
-            <a:off x="822960" y="6144768"/>
-            <a:ext cx="3017520" cy="411480"/>
-          </a:xfrm>
-          <a:prstGeom prst="rect">
-            <a:avLst/>
-          </a:prstGeom>
-          <a:noFill/>
-        </p:spPr>
-        <p:txBody>
-          <a:bodyPr wrap="square">
-            <a:spAutoFit/>
-          </a:bodyPr>
-          <a:lstStyle/>
-          <a:p>
-            <a:pPr algn="l">
-              <a:defRPr sz="1200" b="0" i="0">
-                <a:solidFill>
-                  <a:srgbClr val="1E1E1E"/>
-                </a:solidFill>
-                <a:latin typeface="Calibri"/>
-              </a:defRPr>
-            </a:pPr>
-            <a:r>
-              <a:t>• Chia sẻ cuốn sách (+30 XP)</a:t>
-            </a:r>
-          </a:p>
-        </p:txBody>
-      </p:sp>
-      <p:sp>
-        <p:nvSpPr>
-          <p:cNvPr id="17" name="TextBox 16"/>
-          <p:cNvSpPr txBox="1"/>
-          <p:nvPr/>
-        </p:nvSpPr>
-        <p:spPr>
-          <a:xfrm>
-            <a:off x="822960" y="6574536"/>
-            <a:ext cx="3017520" cy="411480"/>
-          </a:xfrm>
-          <a:prstGeom prst="rect">
-            <a:avLst/>
-          </a:prstGeom>
-          <a:noFill/>
-        </p:spPr>
-        <p:txBody>
-          <a:bodyPr wrap="square">
-            <a:spAutoFit/>
-          </a:bodyPr>
-          <a:lstStyle/>
-          <a:p>
-            <a:pPr algn="l">
-              <a:defRPr sz="1200" b="0" i="0">
-                <a:solidFill>
-                  <a:srgbClr val="1E1E1E"/>
-                </a:solidFill>
-                <a:latin typeface="Calibri"/>
-              </a:defRPr>
-            </a:pPr>
-            <a:r>
-              <a:t>• Lưu 5 trích dẫn (+75 XP)</a:t>
             </a:r>
           </a:p>
         </p:txBody>
@@ -6148,6 +6127,7 @@
           <a:lstStyle/>
           <a:p>
             <a:pPr algn="ctr"/>
+            <a:endParaRPr/>
           </a:p>
         </p:txBody>
       </p:sp>
@@ -6255,6 +6235,7 @@
           <a:lstStyle/>
           <a:p>
             <a:pPr algn="ctr"/>
+            <a:endParaRPr/>
           </a:p>
         </p:txBody>
       </p:sp>
@@ -6442,6 +6423,7 @@
           <a:lstStyle/>
           <a:p>
             <a:pPr algn="ctr"/>
+            <a:endParaRPr/>
           </a:p>
         </p:txBody>
       </p:sp>
@@ -6549,6 +6531,7 @@
           <a:lstStyle/>
           <a:p>
             <a:pPr algn="ctr"/>
+            <a:endParaRPr/>
           </a:p>
         </p:txBody>
       </p:sp>
@@ -6849,7 +6832,7 @@
 </file>
 
 <file path=ppt/slides/slide14.xml><?xml version="1.0" encoding="utf-8"?>
-<p:sld xmlns:a="http://schemas.openxmlformats.org/drawingml/2006/main" xmlns:p="http://schemas.openxmlformats.org/presentationml/2006/main" xmlns:r="http://schemas.openxmlformats.org/officeDocument/2006/relationships">
+<p:sld xmlns:a="http://schemas.openxmlformats.org/drawingml/2006/main" xmlns:r="http://schemas.openxmlformats.org/officeDocument/2006/relationships" xmlns:p="http://schemas.openxmlformats.org/presentationml/2006/main">
   <p:cSld>
     <p:spTree>
       <p:nvGrpSpPr>
@@ -6857,7 +6840,14 @@
         <p:cNvGrpSpPr/>
         <p:nvPr/>
       </p:nvGrpSpPr>
-      <p:grpSpPr/>
+      <p:grpSpPr>
+        <a:xfrm>
+          <a:off x="0" y="0"/>
+          <a:ext cx="0" cy="0"/>
+          <a:chOff x="0" y="0"/>
+          <a:chExt cx="0" cy="0"/>
+        </a:xfrm>
+      </p:grpSpPr>
       <p:sp>
         <p:nvSpPr>
           <p:cNvPr id="2" name="Rectangle 1"/>
@@ -6898,6 +6888,7 @@
           <a:lstStyle/>
           <a:p>
             <a:pPr algn="ctr"/>
+            <a:endParaRPr/>
           </a:p>
         </p:txBody>
       </p:sp>
@@ -6977,6 +6968,7 @@
           <a:lstStyle/>
           <a:p>
             <a:pPr algn="ctr"/>
+            <a:endParaRPr/>
           </a:p>
         </p:txBody>
       </p:sp>
@@ -7017,6 +7009,7 @@
           <a:lstStyle/>
           <a:p>
             <a:pPr algn="ctr"/>
+            <a:endParaRPr/>
           </a:p>
         </p:txBody>
       </p:sp>
@@ -7205,6 +7198,7 @@
           <a:lstStyle/>
           <a:p>
             <a:pPr algn="ctr"/>
+            <a:endParaRPr/>
           </a:p>
         </p:txBody>
       </p:sp>
@@ -7393,6 +7387,7 @@
           <a:lstStyle/>
           <a:p>
             <a:pPr algn="ctr"/>
+            <a:endParaRPr/>
           </a:p>
         </p:txBody>
       </p:sp>
@@ -7581,6 +7576,7 @@
           <a:lstStyle/>
           <a:p>
             <a:pPr algn="ctr"/>
+            <a:endParaRPr/>
           </a:p>
         </p:txBody>
       </p:sp>
@@ -7769,6 +7765,7 @@
           <a:lstStyle/>
           <a:p>
             <a:pPr algn="ctr"/>
+            <a:endParaRPr/>
           </a:p>
         </p:txBody>
       </p:sp>
@@ -7924,6 +7921,7 @@
           <a:lstStyle/>
           <a:p>
             <a:pPr algn="ctr"/>
+            <a:endParaRPr/>
           </a:p>
         </p:txBody>
       </p:sp>
@@ -8152,7 +8150,7 @@
 </file>
 
 <file path=ppt/slides/slide15.xml><?xml version="1.0" encoding="utf-8"?>
-<p:sld xmlns:a="http://schemas.openxmlformats.org/drawingml/2006/main" xmlns:p="http://schemas.openxmlformats.org/presentationml/2006/main" xmlns:r="http://schemas.openxmlformats.org/officeDocument/2006/relationships">
+<p:sld xmlns:a="http://schemas.openxmlformats.org/drawingml/2006/main" xmlns:r="http://schemas.openxmlformats.org/officeDocument/2006/relationships" xmlns:p="http://schemas.openxmlformats.org/presentationml/2006/main">
   <p:cSld>
     <p:spTree>
       <p:nvGrpSpPr>
@@ -8160,7 +8158,14 @@
         <p:cNvGrpSpPr/>
         <p:nvPr/>
       </p:nvGrpSpPr>
-      <p:grpSpPr/>
+      <p:grpSpPr>
+        <a:xfrm>
+          <a:off x="0" y="0"/>
+          <a:ext cx="0" cy="0"/>
+          <a:chOff x="0" y="0"/>
+          <a:chExt cx="0" cy="0"/>
+        </a:xfrm>
+      </p:grpSpPr>
       <p:sp>
         <p:nvSpPr>
           <p:cNvPr id="2" name="Rectangle 1"/>
@@ -8201,6 +8206,7 @@
           <a:lstStyle/>
           <a:p>
             <a:pPr algn="ctr"/>
+            <a:endParaRPr/>
           </a:p>
         </p:txBody>
       </p:sp>
@@ -8280,6 +8286,7 @@
           <a:lstStyle/>
           <a:p>
             <a:pPr algn="ctr"/>
+            <a:endParaRPr/>
           </a:p>
         </p:txBody>
       </p:sp>
@@ -8323,6 +8330,7 @@
           <a:lstStyle/>
           <a:p>
             <a:pPr algn="ctr"/>
+            <a:endParaRPr/>
           </a:p>
         </p:txBody>
       </p:sp>
@@ -8426,6 +8434,7 @@
           <a:lstStyle/>
           <a:p>
             <a:pPr algn="ctr"/>
+            <a:endParaRPr/>
           </a:p>
         </p:txBody>
       </p:sp>
@@ -8510,6 +8519,7 @@
                 <a:latin typeface="Calibri"/>
               </a:defRPr>
             </a:pPr>
+            <a:endParaRPr/>
           </a:p>
           <a:p>
             <a:pPr algn="l">
@@ -8633,6 +8643,7 @@
           <a:lstStyle/>
           <a:p>
             <a:pPr algn="ctr"/>
+            <a:endParaRPr/>
           </a:p>
         </p:txBody>
       </p:sp>
@@ -8736,6 +8747,7 @@
           <a:lstStyle/>
           <a:p>
             <a:pPr algn="ctr"/>
+            <a:endParaRPr/>
           </a:p>
         </p:txBody>
       </p:sp>
@@ -8788,6 +8800,7 @@
                 <a:latin typeface="Calibri"/>
               </a:defRPr>
             </a:pPr>
+            <a:endParaRPr/>
           </a:p>
           <a:p>
             <a:pPr algn="l">
@@ -8849,6 +8862,7 @@
                 <a:latin typeface="Calibri"/>
               </a:defRPr>
             </a:pPr>
+            <a:endParaRPr/>
           </a:p>
           <a:p>
             <a:pPr algn="l">
@@ -8961,7 +8975,7 @@
 </file>
 
 <file path=ppt/slides/slide16.xml><?xml version="1.0" encoding="utf-8"?>
-<p:sld xmlns:a="http://schemas.openxmlformats.org/drawingml/2006/main" xmlns:p="http://schemas.openxmlformats.org/presentationml/2006/main" xmlns:r="http://schemas.openxmlformats.org/officeDocument/2006/relationships">
+<p:sld xmlns:a="http://schemas.openxmlformats.org/drawingml/2006/main" xmlns:r="http://schemas.openxmlformats.org/officeDocument/2006/relationships" xmlns:p="http://schemas.openxmlformats.org/presentationml/2006/main">
   <p:cSld>
     <p:spTree>
       <p:nvGrpSpPr>
@@ -8969,7 +8983,14 @@
         <p:cNvGrpSpPr/>
         <p:nvPr/>
       </p:nvGrpSpPr>
-      <p:grpSpPr/>
+      <p:grpSpPr>
+        <a:xfrm>
+          <a:off x="0" y="0"/>
+          <a:ext cx="0" cy="0"/>
+          <a:chOff x="0" y="0"/>
+          <a:chExt cx="0" cy="0"/>
+        </a:xfrm>
+      </p:grpSpPr>
       <p:sp>
         <p:nvSpPr>
           <p:cNvPr id="2" name="Rectangle 1"/>
@@ -9010,6 +9031,7 @@
           <a:lstStyle/>
           <a:p>
             <a:pPr algn="ctr"/>
+            <a:endParaRPr/>
           </a:p>
         </p:txBody>
       </p:sp>
@@ -9089,6 +9111,7 @@
           <a:lstStyle/>
           <a:p>
             <a:pPr algn="ctr"/>
+            <a:endParaRPr/>
           </a:p>
         </p:txBody>
       </p:sp>
@@ -9100,8 +9123,8 @@
         </p:nvSpPr>
         <p:spPr>
           <a:xfrm>
-            <a:off x="731520" y="1554480"/>
-            <a:ext cx="10698480" cy="2011680"/>
+            <a:off x="731519" y="1554480"/>
+            <a:ext cx="11069711" cy="2011680"/>
           </a:xfrm>
           <a:prstGeom prst="roundRect">
             <a:avLst/>
@@ -9132,6 +9155,7 @@
           <a:lstStyle/>
           <a:p>
             <a:pPr algn="ctr"/>
+            <a:endParaRPr/>
           </a:p>
         </p:txBody>
       </p:sp>
@@ -9211,6 +9235,7 @@
           <a:lstStyle/>
           <a:p>
             <a:pPr algn="ctr"/>
+            <a:endParaRPr/>
           </a:p>
         </p:txBody>
       </p:sp>
@@ -9290,6 +9315,7 @@
           <a:lstStyle/>
           <a:p>
             <a:pPr algn="ctr"/>
+            <a:endParaRPr/>
           </a:p>
         </p:txBody>
       </p:sp>
@@ -9369,6 +9395,7 @@
           <a:lstStyle/>
           <a:p>
             <a:pPr algn="ctr"/>
+            <a:endParaRPr/>
           </a:p>
         </p:txBody>
       </p:sp>
@@ -9452,6 +9479,7 @@
           <a:lstStyle/>
           <a:p>
             <a:pPr algn="ctr"/>
+            <a:endParaRPr/>
           </a:p>
         </p:txBody>
       </p:sp>
@@ -9531,6 +9559,7 @@
           <a:lstStyle/>
           <a:p>
             <a:pPr algn="ctr"/>
+            <a:endParaRPr/>
           </a:p>
         </p:txBody>
       </p:sp>
@@ -9610,6 +9639,7 @@
           <a:lstStyle/>
           <a:p>
             <a:pPr algn="ctr"/>
+            <a:endParaRPr/>
           </a:p>
         </p:txBody>
       </p:sp>
@@ -9689,6 +9719,7 @@
           <a:lstStyle/>
           <a:p>
             <a:pPr algn="ctr"/>
+            <a:endParaRPr/>
           </a:p>
         </p:txBody>
       </p:sp>
@@ -9768,6 +9799,7 @@
           <a:lstStyle/>
           <a:p>
             <a:pPr algn="ctr"/>
+            <a:endParaRPr/>
           </a:p>
         </p:txBody>
       </p:sp>
@@ -9847,6 +9879,7 @@
           <a:lstStyle/>
           <a:p>
             <a:pPr algn="ctr"/>
+            <a:endParaRPr/>
           </a:p>
         </p:txBody>
       </p:sp>
@@ -9930,6 +9963,7 @@
           <a:lstStyle/>
           <a:p>
             <a:pPr algn="ctr"/>
+            <a:endParaRPr/>
           </a:p>
         </p:txBody>
       </p:sp>
@@ -10009,6 +10043,7 @@
           <a:lstStyle/>
           <a:p>
             <a:pPr algn="ctr"/>
+            <a:endParaRPr/>
           </a:p>
         </p:txBody>
       </p:sp>
@@ -10088,6 +10123,7 @@
           <a:lstStyle/>
           <a:p>
             <a:pPr algn="ctr"/>
+            <a:endParaRPr/>
           </a:p>
         </p:txBody>
       </p:sp>
@@ -10195,6 +10231,7 @@
           <a:lstStyle/>
           <a:p>
             <a:pPr algn="ctr"/>
+            <a:endParaRPr/>
           </a:p>
         </p:txBody>
       </p:sp>
@@ -10274,6 +10311,7 @@
           <a:lstStyle/>
           <a:p>
             <a:pPr algn="ctr"/>
+            <a:endParaRPr/>
           </a:p>
         </p:txBody>
       </p:sp>
@@ -10317,6 +10355,7 @@
           <a:lstStyle/>
           <a:p>
             <a:pPr algn="ctr"/>
+            <a:endParaRPr/>
           </a:p>
         </p:txBody>
       </p:sp>
@@ -10424,6 +10463,7 @@
           <a:lstStyle/>
           <a:p>
             <a:pPr algn="ctr"/>
+            <a:endParaRPr/>
           </a:p>
         </p:txBody>
       </p:sp>
@@ -10503,6 +10543,7 @@
           <a:lstStyle/>
           <a:p>
             <a:pPr algn="ctr"/>
+            <a:endParaRPr/>
           </a:p>
         </p:txBody>
       </p:sp>
@@ -10546,6 +10587,7 @@
           <a:lstStyle/>
           <a:p>
             <a:pPr algn="ctr"/>
+            <a:endParaRPr/>
           </a:p>
         </p:txBody>
       </p:sp>
@@ -10653,6 +10695,7 @@
           <a:lstStyle/>
           <a:p>
             <a:pPr algn="ctr"/>
+            <a:endParaRPr/>
           </a:p>
         </p:txBody>
       </p:sp>
@@ -10732,6 +10775,7 @@
           <a:lstStyle/>
           <a:p>
             <a:pPr algn="ctr"/>
+            <a:endParaRPr/>
           </a:p>
         </p:txBody>
       </p:sp>
@@ -10775,6 +10819,7 @@
           <a:lstStyle/>
           <a:p>
             <a:pPr algn="ctr"/>
+            <a:endParaRPr/>
           </a:p>
         </p:txBody>
       </p:sp>
@@ -10882,6 +10927,7 @@
           <a:lstStyle/>
           <a:p>
             <a:pPr algn="ctr"/>
+            <a:endParaRPr/>
           </a:p>
         </p:txBody>
       </p:sp>
@@ -10961,6 +11007,7 @@
           <a:lstStyle/>
           <a:p>
             <a:pPr algn="ctr"/>
+            <a:endParaRPr/>
           </a:p>
         </p:txBody>
       </p:sp>
@@ -11009,7 +11056,7 @@
 </file>
 
 <file path=ppt/slides/slide17.xml><?xml version="1.0" encoding="utf-8"?>
-<p:sld xmlns:a="http://schemas.openxmlformats.org/drawingml/2006/main" xmlns:p="http://schemas.openxmlformats.org/presentationml/2006/main" xmlns:r="http://schemas.openxmlformats.org/officeDocument/2006/relationships">
+<p:sld xmlns:a="http://schemas.openxmlformats.org/drawingml/2006/main" xmlns:r="http://schemas.openxmlformats.org/officeDocument/2006/relationships" xmlns:p="http://schemas.openxmlformats.org/presentationml/2006/main">
   <p:cSld>
     <p:spTree>
       <p:nvGrpSpPr>
@@ -11017,7 +11064,14 @@
         <p:cNvGrpSpPr/>
         <p:nvPr/>
       </p:nvGrpSpPr>
-      <p:grpSpPr/>
+      <p:grpSpPr>
+        <a:xfrm>
+          <a:off x="0" y="0"/>
+          <a:ext cx="0" cy="0"/>
+          <a:chOff x="0" y="0"/>
+          <a:chExt cx="0" cy="0"/>
+        </a:xfrm>
+      </p:grpSpPr>
       <p:sp>
         <p:nvSpPr>
           <p:cNvPr id="2" name="Rectangle 1"/>
@@ -11058,6 +11112,7 @@
           <a:lstStyle/>
           <a:p>
             <a:pPr algn="ctr"/>
+            <a:endParaRPr/>
           </a:p>
         </p:txBody>
       </p:sp>
@@ -11137,6 +11192,7 @@
           <a:lstStyle/>
           <a:p>
             <a:pPr algn="ctr"/>
+            <a:endParaRPr/>
           </a:p>
         </p:txBody>
       </p:sp>
@@ -11257,7 +11313,7 @@
 </file>
 
 <file path=ppt/slides/slide18.xml><?xml version="1.0" encoding="utf-8"?>
-<p:sld xmlns:a="http://schemas.openxmlformats.org/drawingml/2006/main" xmlns:p="http://schemas.openxmlformats.org/presentationml/2006/main" xmlns:r="http://schemas.openxmlformats.org/officeDocument/2006/relationships">
+<p:sld xmlns:a="http://schemas.openxmlformats.org/drawingml/2006/main" xmlns:r="http://schemas.openxmlformats.org/officeDocument/2006/relationships" xmlns:p="http://schemas.openxmlformats.org/presentationml/2006/main">
   <p:cSld>
     <p:spTree>
       <p:nvGrpSpPr>
@@ -11265,7 +11321,14 @@
         <p:cNvGrpSpPr/>
         <p:nvPr/>
       </p:nvGrpSpPr>
-      <p:grpSpPr/>
+      <p:grpSpPr>
+        <a:xfrm>
+          <a:off x="0" y="0"/>
+          <a:ext cx="0" cy="0"/>
+          <a:chOff x="0" y="0"/>
+          <a:chExt cx="0" cy="0"/>
+        </a:xfrm>
+      </p:grpSpPr>
       <p:sp>
         <p:nvSpPr>
           <p:cNvPr id="2" name="Rectangle 1"/>
@@ -11306,6 +11369,7 @@
           <a:lstStyle/>
           <a:p>
             <a:pPr algn="ctr"/>
+            <a:endParaRPr/>
           </a:p>
         </p:txBody>
       </p:sp>
@@ -11385,6 +11449,7 @@
           <a:lstStyle/>
           <a:p>
             <a:pPr algn="ctr"/>
+            <a:endParaRPr/>
           </a:p>
         </p:txBody>
       </p:sp>
@@ -11425,6 +11490,7 @@
           <a:lstStyle/>
           <a:p>
             <a:pPr algn="ctr"/>
+            <a:endParaRPr/>
           </a:p>
         </p:txBody>
       </p:sp>
@@ -11617,6 +11683,7 @@
           <a:lstStyle/>
           <a:p>
             <a:pPr algn="ctr"/>
+            <a:endParaRPr/>
           </a:p>
         </p:txBody>
       </p:sp>
@@ -11809,6 +11876,7 @@
           <a:lstStyle/>
           <a:p>
             <a:pPr algn="ctr"/>
+            <a:endParaRPr/>
           </a:p>
         </p:txBody>
       </p:sp>
@@ -12001,6 +12069,7 @@
           <a:lstStyle/>
           <a:p>
             <a:pPr algn="ctr"/>
+            <a:endParaRPr/>
           </a:p>
         </p:txBody>
       </p:sp>
@@ -12193,6 +12262,7 @@
           <a:lstStyle/>
           <a:p>
             <a:pPr algn="ctr"/>
+            <a:endParaRPr/>
           </a:p>
         </p:txBody>
       </p:sp>
@@ -12385,6 +12455,7 @@
           <a:lstStyle/>
           <a:p>
             <a:pPr algn="ctr"/>
+            <a:endParaRPr/>
           </a:p>
         </p:txBody>
       </p:sp>
@@ -12544,6 +12615,7 @@
           <a:lstStyle/>
           <a:p>
             <a:pPr algn="ctr"/>
+            <a:endParaRPr/>
           </a:p>
         </p:txBody>
       </p:sp>
@@ -12700,7 +12772,7 @@
 </file>
 
 <file path=ppt/slides/slide19.xml><?xml version="1.0" encoding="utf-8"?>
-<p:sld xmlns:a="http://schemas.openxmlformats.org/drawingml/2006/main" xmlns:p="http://schemas.openxmlformats.org/presentationml/2006/main" xmlns:r="http://schemas.openxmlformats.org/officeDocument/2006/relationships">
+<p:sld xmlns:a="http://schemas.openxmlformats.org/drawingml/2006/main" xmlns:r="http://schemas.openxmlformats.org/officeDocument/2006/relationships" xmlns:p="http://schemas.openxmlformats.org/presentationml/2006/main">
   <p:cSld>
     <p:spTree>
       <p:nvGrpSpPr>
@@ -12708,7 +12780,14 @@
         <p:cNvGrpSpPr/>
         <p:nvPr/>
       </p:nvGrpSpPr>
-      <p:grpSpPr/>
+      <p:grpSpPr>
+        <a:xfrm>
+          <a:off x="0" y="0"/>
+          <a:ext cx="0" cy="0"/>
+          <a:chOff x="0" y="0"/>
+          <a:chExt cx="0" cy="0"/>
+        </a:xfrm>
+      </p:grpSpPr>
       <p:sp>
         <p:nvSpPr>
           <p:cNvPr id="2" name="Rectangle 1"/>
@@ -12749,6 +12828,7 @@
           <a:lstStyle/>
           <a:p>
             <a:pPr algn="ctr"/>
+            <a:endParaRPr/>
           </a:p>
         </p:txBody>
       </p:sp>
@@ -12828,6 +12908,7 @@
           <a:lstStyle/>
           <a:p>
             <a:pPr algn="ctr"/>
+            <a:endParaRPr/>
           </a:p>
         </p:txBody>
       </p:sp>
@@ -12871,6 +12952,7 @@
           <a:lstStyle/>
           <a:p>
             <a:pPr algn="ctr"/>
+            <a:endParaRPr/>
           </a:p>
         </p:txBody>
       </p:sp>
@@ -12911,6 +12993,7 @@
           <a:lstStyle/>
           <a:p>
             <a:pPr algn="ctr"/>
+            <a:endParaRPr/>
           </a:p>
         </p:txBody>
       </p:sp>
@@ -13014,6 +13097,7 @@
           <a:lstStyle/>
           <a:p>
             <a:pPr algn="ctr"/>
+            <a:endParaRPr/>
           </a:p>
         </p:txBody>
       </p:sp>
@@ -13101,6 +13185,7 @@
           <a:lstStyle/>
           <a:p>
             <a:pPr algn="ctr"/>
+            <a:endParaRPr/>
           </a:p>
         </p:txBody>
       </p:sp>
@@ -13141,6 +13226,7 @@
           <a:lstStyle/>
           <a:p>
             <a:pPr algn="ctr"/>
+            <a:endParaRPr/>
           </a:p>
         </p:txBody>
       </p:sp>
@@ -13244,6 +13330,7 @@
           <a:lstStyle/>
           <a:p>
             <a:pPr algn="ctr"/>
+            <a:endParaRPr/>
           </a:p>
         </p:txBody>
       </p:sp>
@@ -13331,6 +13418,7 @@
           <a:lstStyle/>
           <a:p>
             <a:pPr algn="ctr"/>
+            <a:endParaRPr/>
           </a:p>
         </p:txBody>
       </p:sp>
@@ -13371,6 +13459,7 @@
           <a:lstStyle/>
           <a:p>
             <a:pPr algn="ctr"/>
+            <a:endParaRPr/>
           </a:p>
         </p:txBody>
       </p:sp>
@@ -13474,6 +13563,7 @@
           <a:lstStyle/>
           <a:p>
             <a:pPr algn="ctr"/>
+            <a:endParaRPr/>
           </a:p>
         </p:txBody>
       </p:sp>
@@ -13637,6 +13727,7 @@
           <a:lstStyle/>
           <a:p>
             <a:pPr algn="ctr"/>
+            <a:endParaRPr/>
           </a:p>
         </p:txBody>
       </p:sp>
@@ -13721,7 +13812,7 @@
 </file>
 
 <file path=ppt/slides/slide2.xml><?xml version="1.0" encoding="utf-8"?>
-<p:sld xmlns:a="http://schemas.openxmlformats.org/drawingml/2006/main" xmlns:p="http://schemas.openxmlformats.org/presentationml/2006/main" xmlns:r="http://schemas.openxmlformats.org/officeDocument/2006/relationships">
+<p:sld xmlns:a="http://schemas.openxmlformats.org/drawingml/2006/main" xmlns:r="http://schemas.openxmlformats.org/officeDocument/2006/relationships" xmlns:p="http://schemas.openxmlformats.org/presentationml/2006/main">
   <p:cSld>
     <p:spTree>
       <p:nvGrpSpPr>
@@ -13729,7 +13820,14 @@
         <p:cNvGrpSpPr/>
         <p:nvPr/>
       </p:nvGrpSpPr>
-      <p:grpSpPr/>
+      <p:grpSpPr>
+        <a:xfrm>
+          <a:off x="0" y="0"/>
+          <a:ext cx="0" cy="0"/>
+          <a:chOff x="0" y="0"/>
+          <a:chExt cx="0" cy="0"/>
+        </a:xfrm>
+      </p:grpSpPr>
       <p:sp>
         <p:nvSpPr>
           <p:cNvPr id="2" name="Rectangle 1"/>
@@ -13770,6 +13868,7 @@
           <a:lstStyle/>
           <a:p>
             <a:pPr algn="ctr"/>
+            <a:endParaRPr/>
           </a:p>
         </p:txBody>
       </p:sp>
@@ -13849,6 +13948,7 @@
           <a:lstStyle/>
           <a:p>
             <a:pPr algn="ctr"/>
+            <a:endParaRPr/>
           </a:p>
         </p:txBody>
       </p:sp>
@@ -13892,6 +13992,7 @@
           <a:lstStyle/>
           <a:p>
             <a:pPr algn="ctr"/>
+            <a:endParaRPr/>
           </a:p>
         </p:txBody>
       </p:sp>
@@ -14007,6 +14108,7 @@
           <a:lstStyle/>
           <a:p>
             <a:pPr algn="ctr"/>
+            <a:endParaRPr/>
           </a:p>
         </p:txBody>
       </p:sp>
@@ -14050,6 +14152,7 @@
           <a:lstStyle/>
           <a:p>
             <a:pPr algn="ctr"/>
+            <a:endParaRPr/>
           </a:p>
         </p:txBody>
       </p:sp>
@@ -14165,6 +14268,7 @@
           <a:lstStyle/>
           <a:p>
             <a:pPr algn="ctr"/>
+            <a:endParaRPr/>
           </a:p>
         </p:txBody>
       </p:sp>
@@ -14208,6 +14312,7 @@
           <a:lstStyle/>
           <a:p>
             <a:pPr algn="ctr"/>
+            <a:endParaRPr/>
           </a:p>
         </p:txBody>
       </p:sp>
@@ -14323,6 +14428,7 @@
           <a:lstStyle/>
           <a:p>
             <a:pPr algn="ctr"/>
+            <a:endParaRPr/>
           </a:p>
         </p:txBody>
       </p:sp>
@@ -14366,6 +14472,7 @@
           <a:lstStyle/>
           <a:p>
             <a:pPr algn="ctr"/>
+            <a:endParaRPr/>
           </a:p>
         </p:txBody>
       </p:sp>
@@ -14481,6 +14588,7 @@
           <a:lstStyle/>
           <a:p>
             <a:pPr algn="ctr"/>
+            <a:endParaRPr/>
           </a:p>
         </p:txBody>
       </p:sp>
@@ -14524,6 +14632,7 @@
           <a:lstStyle/>
           <a:p>
             <a:pPr algn="ctr"/>
+            <a:endParaRPr/>
           </a:p>
         </p:txBody>
       </p:sp>
@@ -14644,7 +14753,7 @@
 </file>
 
 <file path=ppt/slides/slide20.xml><?xml version="1.0" encoding="utf-8"?>
-<p:sld xmlns:a="http://schemas.openxmlformats.org/drawingml/2006/main" xmlns:p="http://schemas.openxmlformats.org/presentationml/2006/main" xmlns:r="http://schemas.openxmlformats.org/officeDocument/2006/relationships">
+<p:sld xmlns:a="http://schemas.openxmlformats.org/drawingml/2006/main" xmlns:r="http://schemas.openxmlformats.org/officeDocument/2006/relationships" xmlns:p="http://schemas.openxmlformats.org/presentationml/2006/main">
   <p:cSld>
     <p:spTree>
       <p:nvGrpSpPr>
@@ -14652,7 +14761,14 @@
         <p:cNvGrpSpPr/>
         <p:nvPr/>
       </p:nvGrpSpPr>
-      <p:grpSpPr/>
+      <p:grpSpPr>
+        <a:xfrm>
+          <a:off x="0" y="0"/>
+          <a:ext cx="0" cy="0"/>
+          <a:chOff x="0" y="0"/>
+          <a:chExt cx="0" cy="0"/>
+        </a:xfrm>
+      </p:grpSpPr>
       <p:sp>
         <p:nvSpPr>
           <p:cNvPr id="2" name="Rectangle 1"/>
@@ -14693,6 +14809,7 @@
           <a:lstStyle/>
           <a:p>
             <a:pPr algn="ctr"/>
+            <a:endParaRPr/>
           </a:p>
         </p:txBody>
       </p:sp>
@@ -14772,6 +14889,7 @@
           <a:lstStyle/>
           <a:p>
             <a:pPr algn="ctr"/>
+            <a:endParaRPr/>
           </a:p>
         </p:txBody>
       </p:sp>
@@ -14892,7 +15010,7 @@
 </file>
 
 <file path=ppt/slides/slide21.xml><?xml version="1.0" encoding="utf-8"?>
-<p:sld xmlns:a="http://schemas.openxmlformats.org/drawingml/2006/main" xmlns:p="http://schemas.openxmlformats.org/presentationml/2006/main" xmlns:r="http://schemas.openxmlformats.org/officeDocument/2006/relationships">
+<p:sld xmlns:a="http://schemas.openxmlformats.org/drawingml/2006/main" xmlns:r="http://schemas.openxmlformats.org/officeDocument/2006/relationships" xmlns:p="http://schemas.openxmlformats.org/presentationml/2006/main">
   <p:cSld>
     <p:spTree>
       <p:nvGrpSpPr>
@@ -14900,7 +15018,14 @@
         <p:cNvGrpSpPr/>
         <p:nvPr/>
       </p:nvGrpSpPr>
-      <p:grpSpPr/>
+      <p:grpSpPr>
+        <a:xfrm>
+          <a:off x="0" y="0"/>
+          <a:ext cx="0" cy="0"/>
+          <a:chOff x="0" y="0"/>
+          <a:chExt cx="0" cy="0"/>
+        </a:xfrm>
+      </p:grpSpPr>
       <p:sp>
         <p:nvSpPr>
           <p:cNvPr id="2" name="Rectangle 1"/>
@@ -14941,6 +15066,7 @@
           <a:lstStyle/>
           <a:p>
             <a:pPr algn="ctr"/>
+            <a:endParaRPr/>
           </a:p>
         </p:txBody>
       </p:sp>
@@ -15020,6 +15146,7 @@
           <a:lstStyle/>
           <a:p>
             <a:pPr algn="ctr"/>
+            <a:endParaRPr/>
           </a:p>
         </p:txBody>
       </p:sp>
@@ -15063,6 +15190,7 @@
           <a:lstStyle/>
           <a:p>
             <a:pPr algn="ctr"/>
+            <a:endParaRPr/>
           </a:p>
         </p:txBody>
       </p:sp>
@@ -15166,6 +15294,7 @@
           <a:lstStyle/>
           <a:p>
             <a:pPr algn="ctr"/>
+            <a:endParaRPr/>
           </a:p>
         </p:txBody>
       </p:sp>
@@ -15253,6 +15382,7 @@
           <a:lstStyle/>
           <a:p>
             <a:pPr algn="ctr"/>
+            <a:endParaRPr/>
           </a:p>
         </p:txBody>
       </p:sp>
@@ -15296,6 +15426,7 @@
           <a:lstStyle/>
           <a:p>
             <a:pPr algn="ctr"/>
+            <a:endParaRPr/>
           </a:p>
         </p:txBody>
       </p:sp>
@@ -15399,6 +15530,7 @@
           <a:lstStyle/>
           <a:p>
             <a:pPr algn="ctr"/>
+            <a:endParaRPr/>
           </a:p>
         </p:txBody>
       </p:sp>
@@ -15486,6 +15618,7 @@
           <a:lstStyle/>
           <a:p>
             <a:pPr algn="ctr"/>
+            <a:endParaRPr/>
           </a:p>
         </p:txBody>
       </p:sp>
@@ -15529,6 +15662,7 @@
           <a:lstStyle/>
           <a:p>
             <a:pPr algn="ctr"/>
+            <a:endParaRPr/>
           </a:p>
         </p:txBody>
       </p:sp>
@@ -15632,6 +15766,7 @@
           <a:lstStyle/>
           <a:p>
             <a:pPr algn="ctr"/>
+            <a:endParaRPr/>
           </a:p>
         </p:txBody>
       </p:sp>
@@ -15719,6 +15854,7 @@
           <a:lstStyle/>
           <a:p>
             <a:pPr algn="ctr"/>
+            <a:endParaRPr/>
           </a:p>
         </p:txBody>
       </p:sp>
@@ -15762,6 +15898,7 @@
           <a:lstStyle/>
           <a:p>
             <a:pPr algn="ctr"/>
+            <a:endParaRPr/>
           </a:p>
         </p:txBody>
       </p:sp>
@@ -15865,6 +16002,7 @@
           <a:lstStyle/>
           <a:p>
             <a:pPr algn="ctr"/>
+            <a:endParaRPr/>
           </a:p>
         </p:txBody>
       </p:sp>
@@ -15952,6 +16090,7 @@
           <a:lstStyle/>
           <a:p>
             <a:pPr algn="ctr"/>
+            <a:endParaRPr/>
           </a:p>
         </p:txBody>
       </p:sp>
@@ -15995,6 +16134,7 @@
           <a:lstStyle/>
           <a:p>
             <a:pPr algn="ctr"/>
+            <a:endParaRPr/>
           </a:p>
         </p:txBody>
       </p:sp>
@@ -16098,6 +16238,7 @@
           <a:lstStyle/>
           <a:p>
             <a:pPr algn="ctr"/>
+            <a:endParaRPr/>
           </a:p>
         </p:txBody>
       </p:sp>
@@ -16185,6 +16326,7 @@
           <a:lstStyle/>
           <a:p>
             <a:pPr algn="ctr"/>
+            <a:endParaRPr/>
           </a:p>
         </p:txBody>
       </p:sp>
@@ -16233,7 +16375,7 @@
 </file>
 
 <file path=ppt/slides/slide22.xml><?xml version="1.0" encoding="utf-8"?>
-<p:sld xmlns:a="http://schemas.openxmlformats.org/drawingml/2006/main" xmlns:p="http://schemas.openxmlformats.org/presentationml/2006/main" xmlns:r="http://schemas.openxmlformats.org/officeDocument/2006/relationships">
+<p:sld xmlns:a="http://schemas.openxmlformats.org/drawingml/2006/main" xmlns:r="http://schemas.openxmlformats.org/officeDocument/2006/relationships" xmlns:p="http://schemas.openxmlformats.org/presentationml/2006/main">
   <p:cSld>
     <p:spTree>
       <p:nvGrpSpPr>
@@ -16241,7 +16383,14 @@
         <p:cNvGrpSpPr/>
         <p:nvPr/>
       </p:nvGrpSpPr>
-      <p:grpSpPr/>
+      <p:grpSpPr>
+        <a:xfrm>
+          <a:off x="0" y="0"/>
+          <a:ext cx="0" cy="0"/>
+          <a:chOff x="0" y="0"/>
+          <a:chExt cx="0" cy="0"/>
+        </a:xfrm>
+      </p:grpSpPr>
       <p:sp>
         <p:nvSpPr>
           <p:cNvPr id="2" name="Rectangle 1"/>
@@ -16282,6 +16431,7 @@
           <a:lstStyle/>
           <a:p>
             <a:pPr algn="ctr"/>
+            <a:endParaRPr/>
           </a:p>
         </p:txBody>
       </p:sp>
@@ -16361,6 +16511,7 @@
           <a:lstStyle/>
           <a:p>
             <a:pPr algn="ctr"/>
+            <a:endParaRPr/>
           </a:p>
         </p:txBody>
       </p:sp>
@@ -16404,6 +16555,7 @@
           <a:lstStyle/>
           <a:p>
             <a:pPr algn="ctr"/>
+            <a:endParaRPr/>
           </a:p>
         </p:txBody>
       </p:sp>
@@ -16507,6 +16659,7 @@
           <a:lstStyle/>
           <a:p>
             <a:pPr algn="ctr"/>
+            <a:endParaRPr/>
           </a:p>
         </p:txBody>
       </p:sp>
@@ -16590,6 +16743,7 @@
           <a:lstStyle/>
           <a:p>
             <a:pPr algn="ctr"/>
+            <a:endParaRPr/>
           </a:p>
         </p:txBody>
       </p:sp>
@@ -16633,6 +16787,7 @@
           <a:lstStyle/>
           <a:p>
             <a:pPr algn="ctr"/>
+            <a:endParaRPr/>
           </a:p>
         </p:txBody>
       </p:sp>
@@ -16736,6 +16891,7 @@
           <a:lstStyle/>
           <a:p>
             <a:pPr algn="ctr"/>
+            <a:endParaRPr/>
           </a:p>
         </p:txBody>
       </p:sp>
@@ -16819,6 +16975,7 @@
           <a:lstStyle/>
           <a:p>
             <a:pPr algn="ctr"/>
+            <a:endParaRPr/>
           </a:p>
         </p:txBody>
       </p:sp>
@@ -16862,6 +17019,7 @@
           <a:lstStyle/>
           <a:p>
             <a:pPr algn="ctr"/>
+            <a:endParaRPr/>
           </a:p>
         </p:txBody>
       </p:sp>
@@ -16965,6 +17123,7 @@
           <a:lstStyle/>
           <a:p>
             <a:pPr algn="ctr"/>
+            <a:endParaRPr/>
           </a:p>
         </p:txBody>
       </p:sp>
@@ -17048,6 +17207,7 @@
           <a:lstStyle/>
           <a:p>
             <a:pPr algn="ctr"/>
+            <a:endParaRPr/>
           </a:p>
         </p:txBody>
       </p:sp>
@@ -17091,6 +17251,7 @@
           <a:lstStyle/>
           <a:p>
             <a:pPr algn="ctr"/>
+            <a:endParaRPr/>
           </a:p>
         </p:txBody>
       </p:sp>
@@ -17194,6 +17355,7 @@
           <a:lstStyle/>
           <a:p>
             <a:pPr algn="ctr"/>
+            <a:endParaRPr/>
           </a:p>
         </p:txBody>
       </p:sp>
@@ -17281,6 +17443,7 @@
           <a:lstStyle/>
           <a:p>
             <a:pPr algn="ctr"/>
+            <a:endParaRPr/>
           </a:p>
         </p:txBody>
       </p:sp>
@@ -17324,6 +17487,7 @@
           <a:lstStyle/>
           <a:p>
             <a:pPr algn="ctr"/>
+            <a:endParaRPr/>
           </a:p>
         </p:txBody>
       </p:sp>
@@ -17427,6 +17591,7 @@
           <a:lstStyle/>
           <a:p>
             <a:pPr algn="ctr"/>
+            <a:endParaRPr/>
           </a:p>
         </p:txBody>
       </p:sp>
@@ -17510,6 +17675,7 @@
           <a:lstStyle/>
           <a:p>
             <a:pPr algn="ctr"/>
+            <a:endParaRPr/>
           </a:p>
         </p:txBody>
       </p:sp>
@@ -17553,6 +17719,7 @@
           <a:lstStyle/>
           <a:p>
             <a:pPr algn="ctr"/>
+            <a:endParaRPr/>
           </a:p>
         </p:txBody>
       </p:sp>
@@ -17637,7 +17804,7 @@
 </file>
 
 <file path=ppt/slides/slide23.xml><?xml version="1.0" encoding="utf-8"?>
-<p:sld xmlns:a="http://schemas.openxmlformats.org/drawingml/2006/main" xmlns:p="http://schemas.openxmlformats.org/presentationml/2006/main" xmlns:r="http://schemas.openxmlformats.org/officeDocument/2006/relationships">
+<p:sld xmlns:a="http://schemas.openxmlformats.org/drawingml/2006/main" xmlns:r="http://schemas.openxmlformats.org/officeDocument/2006/relationships" xmlns:p="http://schemas.openxmlformats.org/presentationml/2006/main">
   <p:cSld>
     <p:spTree>
       <p:nvGrpSpPr>
@@ -17645,7 +17812,14 @@
         <p:cNvGrpSpPr/>
         <p:nvPr/>
       </p:nvGrpSpPr>
-      <p:grpSpPr/>
+      <p:grpSpPr>
+        <a:xfrm>
+          <a:off x="0" y="0"/>
+          <a:ext cx="0" cy="0"/>
+          <a:chOff x="0" y="0"/>
+          <a:chExt cx="0" cy="0"/>
+        </a:xfrm>
+      </p:grpSpPr>
       <p:sp>
         <p:nvSpPr>
           <p:cNvPr id="2" name="Rectangle 1"/>
@@ -17686,6 +17860,7 @@
           <a:lstStyle/>
           <a:p>
             <a:pPr algn="ctr"/>
+            <a:endParaRPr/>
           </a:p>
         </p:txBody>
       </p:sp>
@@ -17765,6 +17940,7 @@
           <a:lstStyle/>
           <a:p>
             <a:pPr algn="ctr"/>
+            <a:endParaRPr/>
           </a:p>
         </p:txBody>
       </p:sp>
@@ -17889,7 +18065,7 @@
 </file>
 
 <file path=ppt/slides/slide3.xml><?xml version="1.0" encoding="utf-8"?>
-<p:sld xmlns:a="http://schemas.openxmlformats.org/drawingml/2006/main" xmlns:p="http://schemas.openxmlformats.org/presentationml/2006/main" xmlns:r="http://schemas.openxmlformats.org/officeDocument/2006/relationships">
+<p:sld xmlns:a="http://schemas.openxmlformats.org/drawingml/2006/main" xmlns:r="http://schemas.openxmlformats.org/officeDocument/2006/relationships" xmlns:p="http://schemas.openxmlformats.org/presentationml/2006/main">
   <p:cSld>
     <p:spTree>
       <p:nvGrpSpPr>
@@ -17897,7 +18073,14 @@
         <p:cNvGrpSpPr/>
         <p:nvPr/>
       </p:nvGrpSpPr>
-      <p:grpSpPr/>
+      <p:grpSpPr>
+        <a:xfrm>
+          <a:off x="0" y="0"/>
+          <a:ext cx="0" cy="0"/>
+          <a:chOff x="0" y="0"/>
+          <a:chExt cx="0" cy="0"/>
+        </a:xfrm>
+      </p:grpSpPr>
       <p:sp>
         <p:nvSpPr>
           <p:cNvPr id="2" name="Rectangle 1"/>
@@ -17938,6 +18121,7 @@
           <a:lstStyle/>
           <a:p>
             <a:pPr algn="ctr"/>
+            <a:endParaRPr/>
           </a:p>
         </p:txBody>
       </p:sp>
@@ -18017,6 +18201,7 @@
           <a:lstStyle/>
           <a:p>
             <a:pPr algn="ctr"/>
+            <a:endParaRPr/>
           </a:p>
         </p:txBody>
       </p:sp>
@@ -18137,7 +18322,7 @@
 </file>
 
 <file path=ppt/slides/slide4.xml><?xml version="1.0" encoding="utf-8"?>
-<p:sld xmlns:a="http://schemas.openxmlformats.org/drawingml/2006/main" xmlns:p="http://schemas.openxmlformats.org/presentationml/2006/main" xmlns:r="http://schemas.openxmlformats.org/officeDocument/2006/relationships">
+<p:sld xmlns:a="http://schemas.openxmlformats.org/drawingml/2006/main" xmlns:r="http://schemas.openxmlformats.org/officeDocument/2006/relationships" xmlns:p="http://schemas.openxmlformats.org/presentationml/2006/main">
   <p:cSld>
     <p:spTree>
       <p:nvGrpSpPr>
@@ -18145,7 +18330,14 @@
         <p:cNvGrpSpPr/>
         <p:nvPr/>
       </p:nvGrpSpPr>
-      <p:grpSpPr/>
+      <p:grpSpPr>
+        <a:xfrm>
+          <a:off x="0" y="0"/>
+          <a:ext cx="0" cy="0"/>
+          <a:chOff x="0" y="0"/>
+          <a:chExt cx="0" cy="0"/>
+        </a:xfrm>
+      </p:grpSpPr>
       <p:sp>
         <p:nvSpPr>
           <p:cNvPr id="2" name="Rectangle 1"/>
@@ -18186,6 +18378,7 @@
           <a:lstStyle/>
           <a:p>
             <a:pPr algn="ctr"/>
+            <a:endParaRPr/>
           </a:p>
         </p:txBody>
       </p:sp>
@@ -18265,6 +18458,7 @@
           <a:lstStyle/>
           <a:p>
             <a:pPr algn="ctr"/>
+            <a:endParaRPr/>
           </a:p>
         </p:txBody>
       </p:sp>
@@ -18380,6 +18574,7 @@
           <a:lstStyle/>
           <a:p>
             <a:pPr algn="ctr"/>
+            <a:endParaRPr/>
           </a:p>
         </p:txBody>
       </p:sp>
@@ -18543,6 +18738,7 @@
           <a:lstStyle/>
           <a:p>
             <a:pPr algn="ctr"/>
+            <a:endParaRPr/>
           </a:p>
         </p:txBody>
       </p:sp>
@@ -18706,6 +18902,7 @@
           <a:lstStyle/>
           <a:p>
             <a:pPr algn="ctr"/>
+            <a:endParaRPr/>
           </a:p>
         </p:txBody>
       </p:sp>
@@ -18785,6 +18982,7 @@
           <a:lstStyle/>
           <a:p>
             <a:pPr algn="ctr"/>
+            <a:endParaRPr/>
           </a:p>
         </p:txBody>
       </p:sp>
@@ -18952,7 +19150,7 @@
 </file>
 
 <file path=ppt/slides/slide5.xml><?xml version="1.0" encoding="utf-8"?>
-<p:sld xmlns:a="http://schemas.openxmlformats.org/drawingml/2006/main" xmlns:p="http://schemas.openxmlformats.org/presentationml/2006/main" xmlns:r="http://schemas.openxmlformats.org/officeDocument/2006/relationships">
+<p:sld xmlns:a="http://schemas.openxmlformats.org/drawingml/2006/main" xmlns:r="http://schemas.openxmlformats.org/officeDocument/2006/relationships" xmlns:p="http://schemas.openxmlformats.org/presentationml/2006/main">
   <p:cSld>
     <p:spTree>
       <p:nvGrpSpPr>
@@ -18960,7 +19158,14 @@
         <p:cNvGrpSpPr/>
         <p:nvPr/>
       </p:nvGrpSpPr>
-      <p:grpSpPr/>
+      <p:grpSpPr>
+        <a:xfrm>
+          <a:off x="0" y="0"/>
+          <a:ext cx="0" cy="0"/>
+          <a:chOff x="0" y="0"/>
+          <a:chExt cx="0" cy="0"/>
+        </a:xfrm>
+      </p:grpSpPr>
       <p:sp>
         <p:nvSpPr>
           <p:cNvPr id="2" name="Rectangle 1"/>
@@ -19001,6 +19206,7 @@
           <a:lstStyle/>
           <a:p>
             <a:pPr algn="ctr"/>
+            <a:endParaRPr/>
           </a:p>
         </p:txBody>
       </p:sp>
@@ -19080,6 +19286,7 @@
           <a:lstStyle/>
           <a:p>
             <a:pPr algn="ctr"/>
+            <a:endParaRPr/>
           </a:p>
         </p:txBody>
       </p:sp>
@@ -19123,6 +19330,7 @@
           <a:lstStyle/>
           <a:p>
             <a:pPr algn="ctr"/>
+            <a:endParaRPr/>
           </a:p>
         </p:txBody>
       </p:sp>
@@ -19163,6 +19371,7 @@
           <a:lstStyle/>
           <a:p>
             <a:pPr algn="ctr"/>
+            <a:endParaRPr/>
           </a:p>
         </p:txBody>
       </p:sp>
@@ -19175,7 +19384,9 @@
           <p:nvPr/>
         </p:nvPicPr>
         <p:blipFill>
-          <a:blip r:embed="rId2"/>
+          <a:blip r:embed="rId2">
+            <a:lum bright="70000" contrast="-70000"/>
+          </a:blip>
           <a:stretch>
             <a:fillRect/>
           </a:stretch>
@@ -19314,6 +19525,7 @@
           <a:lstStyle/>
           <a:p>
             <a:pPr algn="ctr"/>
+            <a:endParaRPr/>
           </a:p>
         </p:txBody>
       </p:sp>
@@ -19354,6 +19566,7 @@
           <a:lstStyle/>
           <a:p>
             <a:pPr algn="ctr"/>
+            <a:endParaRPr/>
           </a:p>
         </p:txBody>
       </p:sp>
@@ -19505,6 +19718,7 @@
           <a:lstStyle/>
           <a:p>
             <a:pPr algn="ctr"/>
+            <a:endParaRPr/>
           </a:p>
         </p:txBody>
       </p:sp>
@@ -19545,6 +19759,7 @@
           <a:lstStyle/>
           <a:p>
             <a:pPr algn="ctr"/>
+            <a:endParaRPr/>
           </a:p>
         </p:txBody>
       </p:sp>
@@ -19701,7 +19916,7 @@
 </file>
 
 <file path=ppt/slides/slide6.xml><?xml version="1.0" encoding="utf-8"?>
-<p:sld xmlns:a="http://schemas.openxmlformats.org/drawingml/2006/main" xmlns:p="http://schemas.openxmlformats.org/presentationml/2006/main" xmlns:r="http://schemas.openxmlformats.org/officeDocument/2006/relationships">
+<p:sld xmlns:a="http://schemas.openxmlformats.org/drawingml/2006/main" xmlns:r="http://schemas.openxmlformats.org/officeDocument/2006/relationships" xmlns:p="http://schemas.openxmlformats.org/presentationml/2006/main">
   <p:cSld>
     <p:spTree>
       <p:nvGrpSpPr>
@@ -19709,7 +19924,14 @@
         <p:cNvGrpSpPr/>
         <p:nvPr/>
       </p:nvGrpSpPr>
-      <p:grpSpPr/>
+      <p:grpSpPr>
+        <a:xfrm>
+          <a:off x="0" y="0"/>
+          <a:ext cx="0" cy="0"/>
+          <a:chOff x="0" y="0"/>
+          <a:chExt cx="0" cy="0"/>
+        </a:xfrm>
+      </p:grpSpPr>
       <p:sp>
         <p:nvSpPr>
           <p:cNvPr id="2" name="Rectangle 1"/>
@@ -19750,6 +19972,7 @@
           <a:lstStyle/>
           <a:p>
             <a:pPr algn="ctr"/>
+            <a:endParaRPr/>
           </a:p>
         </p:txBody>
       </p:sp>
@@ -19829,6 +20052,7 @@
           <a:lstStyle/>
           <a:p>
             <a:pPr algn="ctr"/>
+            <a:endParaRPr/>
           </a:p>
         </p:txBody>
       </p:sp>
@@ -19908,6 +20132,7 @@
           <a:lstStyle/>
           <a:p>
             <a:pPr algn="ctr"/>
+            <a:endParaRPr/>
           </a:p>
         </p:txBody>
       </p:sp>
@@ -20015,6 +20240,7 @@
           <a:lstStyle/>
           <a:p>
             <a:pPr algn="ctr"/>
+            <a:endParaRPr/>
           </a:p>
         </p:txBody>
       </p:sp>
@@ -20102,6 +20328,7 @@
           <a:lstStyle/>
           <a:p>
             <a:pPr algn="ctr"/>
+            <a:endParaRPr/>
           </a:p>
         </p:txBody>
       </p:sp>
@@ -20209,6 +20436,7 @@
           <a:lstStyle/>
           <a:p>
             <a:pPr algn="ctr"/>
+            <a:endParaRPr/>
           </a:p>
         </p:txBody>
       </p:sp>
@@ -20296,6 +20524,7 @@
           <a:lstStyle/>
           <a:p>
             <a:pPr algn="ctr"/>
+            <a:endParaRPr/>
           </a:p>
         </p:txBody>
       </p:sp>
@@ -20403,6 +20632,7 @@
           <a:lstStyle/>
           <a:p>
             <a:pPr algn="ctr"/>
+            <a:endParaRPr/>
           </a:p>
         </p:txBody>
       </p:sp>
@@ -20495,7 +20725,7 @@
 </file>
 
 <file path=ppt/slides/slide7.xml><?xml version="1.0" encoding="utf-8"?>
-<p:sld xmlns:a="http://schemas.openxmlformats.org/drawingml/2006/main" xmlns:p="http://schemas.openxmlformats.org/presentationml/2006/main" xmlns:r="http://schemas.openxmlformats.org/officeDocument/2006/relationships">
+<p:sld xmlns:a="http://schemas.openxmlformats.org/drawingml/2006/main" xmlns:r="http://schemas.openxmlformats.org/officeDocument/2006/relationships" xmlns:p="http://schemas.openxmlformats.org/presentationml/2006/main">
   <p:cSld>
     <p:spTree>
       <p:nvGrpSpPr>
@@ -20503,7 +20733,14 @@
         <p:cNvGrpSpPr/>
         <p:nvPr/>
       </p:nvGrpSpPr>
-      <p:grpSpPr/>
+      <p:grpSpPr>
+        <a:xfrm>
+          <a:off x="0" y="0"/>
+          <a:ext cx="0" cy="0"/>
+          <a:chOff x="0" y="0"/>
+          <a:chExt cx="0" cy="0"/>
+        </a:xfrm>
+      </p:grpSpPr>
       <p:sp>
         <p:nvSpPr>
           <p:cNvPr id="2" name="Rectangle 1"/>
@@ -20544,6 +20781,7 @@
           <a:lstStyle/>
           <a:p>
             <a:pPr algn="ctr"/>
+            <a:endParaRPr/>
           </a:p>
         </p:txBody>
       </p:sp>
@@ -20623,6 +20861,7 @@
           <a:lstStyle/>
           <a:p>
             <a:pPr algn="ctr"/>
+            <a:endParaRPr/>
           </a:p>
         </p:txBody>
       </p:sp>
@@ -20743,7 +20982,7 @@
 </file>
 
 <file path=ppt/slides/slide8.xml><?xml version="1.0" encoding="utf-8"?>
-<p:sld xmlns:a="http://schemas.openxmlformats.org/drawingml/2006/main" xmlns:p="http://schemas.openxmlformats.org/presentationml/2006/main" xmlns:r="http://schemas.openxmlformats.org/officeDocument/2006/relationships">
+<p:sld xmlns:a="http://schemas.openxmlformats.org/drawingml/2006/main" xmlns:r="http://schemas.openxmlformats.org/officeDocument/2006/relationships" xmlns:p="http://schemas.openxmlformats.org/presentationml/2006/main">
   <p:cSld>
     <p:spTree>
       <p:nvGrpSpPr>
@@ -20751,7 +20990,14 @@
         <p:cNvGrpSpPr/>
         <p:nvPr/>
       </p:nvGrpSpPr>
-      <p:grpSpPr/>
+      <p:grpSpPr>
+        <a:xfrm>
+          <a:off x="0" y="0"/>
+          <a:ext cx="0" cy="0"/>
+          <a:chOff x="0" y="0"/>
+          <a:chExt cx="0" cy="0"/>
+        </a:xfrm>
+      </p:grpSpPr>
       <p:sp>
         <p:nvSpPr>
           <p:cNvPr id="2" name="Rectangle 1"/>
@@ -20792,6 +21038,7 @@
           <a:lstStyle/>
           <a:p>
             <a:pPr algn="ctr"/>
+            <a:endParaRPr/>
           </a:p>
         </p:txBody>
       </p:sp>
@@ -20871,6 +21118,7 @@
           <a:lstStyle/>
           <a:p>
             <a:pPr algn="ctr"/>
+            <a:endParaRPr/>
           </a:p>
         </p:txBody>
       </p:sp>
@@ -20914,6 +21162,7 @@
           <a:lstStyle/>
           <a:p>
             <a:pPr algn="ctr"/>
+            <a:endParaRPr/>
           </a:p>
         </p:txBody>
       </p:sp>
@@ -21061,6 +21310,7 @@
           <a:lstStyle/>
           <a:p>
             <a:pPr algn="ctr"/>
+            <a:endParaRPr/>
           </a:p>
         </p:txBody>
       </p:sp>
@@ -21212,6 +21462,7 @@
           <a:lstStyle/>
           <a:p>
             <a:pPr algn="ctr"/>
+            <a:endParaRPr/>
           </a:p>
         </p:txBody>
       </p:sp>
@@ -21363,6 +21614,7 @@
           <a:lstStyle/>
           <a:p>
             <a:pPr algn="ctr"/>
+            <a:endParaRPr/>
           </a:p>
         </p:txBody>
       </p:sp>
@@ -21442,6 +21694,7 @@
           <a:lstStyle/>
           <a:p>
             <a:pPr algn="ctr"/>
+            <a:endParaRPr/>
           </a:p>
         </p:txBody>
       </p:sp>
@@ -21746,7 +21999,7 @@
 </file>
 
 <file path=ppt/slides/slide9.xml><?xml version="1.0" encoding="utf-8"?>
-<p:sld xmlns:a="http://schemas.openxmlformats.org/drawingml/2006/main" xmlns:p="http://schemas.openxmlformats.org/presentationml/2006/main" xmlns:r="http://schemas.openxmlformats.org/officeDocument/2006/relationships">
+<p:sld xmlns:a="http://schemas.openxmlformats.org/drawingml/2006/main" xmlns:r="http://schemas.openxmlformats.org/officeDocument/2006/relationships" xmlns:p="http://schemas.openxmlformats.org/presentationml/2006/main">
   <p:cSld>
     <p:spTree>
       <p:nvGrpSpPr>
@@ -21754,7 +22007,14 @@
         <p:cNvGrpSpPr/>
         <p:nvPr/>
       </p:nvGrpSpPr>
-      <p:grpSpPr/>
+      <p:grpSpPr>
+        <a:xfrm>
+          <a:off x="0" y="0"/>
+          <a:ext cx="0" cy="0"/>
+          <a:chOff x="0" y="0"/>
+          <a:chExt cx="0" cy="0"/>
+        </a:xfrm>
+      </p:grpSpPr>
       <p:sp>
         <p:nvSpPr>
           <p:cNvPr id="2" name="Rectangle 1"/>
@@ -21795,6 +22055,7 @@
           <a:lstStyle/>
           <a:p>
             <a:pPr algn="ctr"/>
+            <a:endParaRPr/>
           </a:p>
         </p:txBody>
       </p:sp>
@@ -21874,6 +22135,7 @@
           <a:lstStyle/>
           <a:p>
             <a:pPr algn="ctr"/>
+            <a:endParaRPr/>
           </a:p>
         </p:txBody>
       </p:sp>
@@ -21917,6 +22179,7 @@
           <a:lstStyle/>
           <a:p>
             <a:pPr algn="ctr"/>
+            <a:endParaRPr/>
           </a:p>
         </p:txBody>
       </p:sp>
@@ -22024,6 +22287,7 @@
           <a:lstStyle/>
           <a:p>
             <a:pPr algn="ctr"/>
+            <a:endParaRPr/>
           </a:p>
         </p:txBody>
       </p:sp>
@@ -22111,6 +22375,7 @@
           <a:lstStyle/>
           <a:p>
             <a:pPr algn="ctr"/>
+            <a:endParaRPr/>
           </a:p>
         </p:txBody>
       </p:sp>
@@ -22218,6 +22483,7 @@
           <a:lstStyle/>
           <a:p>
             <a:pPr algn="ctr"/>
+            <a:endParaRPr/>
           </a:p>
         </p:txBody>
       </p:sp>
@@ -22305,6 +22571,7 @@
           <a:lstStyle/>
           <a:p>
             <a:pPr algn="ctr"/>
+            <a:endParaRPr/>
           </a:p>
         </p:txBody>
       </p:sp>
@@ -22412,6 +22679,7 @@
           <a:lstStyle/>
           <a:p>
             <a:pPr algn="ctr"/>
+            <a:endParaRPr/>
           </a:p>
         </p:txBody>
       </p:sp>
@@ -22499,6 +22767,7 @@
           <a:lstStyle/>
           <a:p>
             <a:pPr algn="ctr"/>
+            <a:endParaRPr/>
           </a:p>
         </p:txBody>
       </p:sp>
@@ -22606,6 +22875,7 @@
           <a:lstStyle/>
           <a:p>
             <a:pPr algn="ctr"/>
+            <a:endParaRPr/>
           </a:p>
         </p:txBody>
       </p:sp>
